--- a/方案优化版2.pptx
+++ b/方案优化版2.pptx
@@ -8,15 +8,16 @@
     <p:sldId id="261" r:id="rId2"/>
     <p:sldId id="264" r:id="rId3"/>
     <p:sldId id="266" r:id="rId4"/>
-    <p:sldId id="257" r:id="rId5"/>
-    <p:sldId id="258" r:id="rId6"/>
-    <p:sldId id="263" r:id="rId7"/>
-    <p:sldId id="265" r:id="rId8"/>
-    <p:sldId id="267" r:id="rId9"/>
-    <p:sldId id="268" r:id="rId10"/>
-    <p:sldId id="269" r:id="rId11"/>
-    <p:sldId id="259" r:id="rId12"/>
-    <p:sldId id="260" r:id="rId13"/>
+    <p:sldId id="270" r:id="rId5"/>
+    <p:sldId id="257" r:id="rId6"/>
+    <p:sldId id="258" r:id="rId7"/>
+    <p:sldId id="263" r:id="rId8"/>
+    <p:sldId id="265" r:id="rId9"/>
+    <p:sldId id="267" r:id="rId10"/>
+    <p:sldId id="268" r:id="rId11"/>
+    <p:sldId id="269" r:id="rId12"/>
+    <p:sldId id="259" r:id="rId13"/>
+    <p:sldId id="260" r:id="rId14"/>
   </p:sldIdLst>
   <p:sldSz cx="12192000" cy="6858000"/>
   <p:notesSz cx="6858000" cy="9144000"/>
@@ -263,7 +264,7 @@
           <a:p>
             <a:fld id="{D997B5FA-0921-464F-AAE1-844C04324D75}" type="datetimeFigureOut">
               <a:rPr lang="zh-CN" altLang="en-US" smtClean="0"/>
-              <a:t>2026/10/14</a:t>
+              <a:t>2026/10/16</a:t>
             </a:fld>
             <a:endParaRPr lang="zh-CN" altLang="en-US"/>
           </a:p>
@@ -426,7 +427,7 @@
           <a:p>
             <a:fld id="{D997B5FA-0921-464F-AAE1-844C04324D75}" type="datetimeFigureOut">
               <a:rPr lang="zh-CN" altLang="en-US" smtClean="0"/>
-              <a:t>2026/10/14</a:t>
+              <a:t>2026/10/16</a:t>
             </a:fld>
             <a:endParaRPr lang="zh-CN" altLang="en-US"/>
           </a:p>
@@ -599,7 +600,7 @@
           <a:p>
             <a:fld id="{D997B5FA-0921-464F-AAE1-844C04324D75}" type="datetimeFigureOut">
               <a:rPr lang="zh-CN" altLang="en-US" smtClean="0"/>
-              <a:t>2026/10/14</a:t>
+              <a:t>2026/10/16</a:t>
             </a:fld>
             <a:endParaRPr lang="zh-CN" altLang="en-US"/>
           </a:p>
@@ -762,7 +763,7 @@
           <a:p>
             <a:fld id="{D997B5FA-0921-464F-AAE1-844C04324D75}" type="datetimeFigureOut">
               <a:rPr lang="zh-CN" altLang="en-US" smtClean="0"/>
-              <a:t>2026/10/14</a:t>
+              <a:t>2026/10/16</a:t>
             </a:fld>
             <a:endParaRPr lang="zh-CN" altLang="en-US"/>
           </a:p>
@@ -1002,7 +1003,7 @@
           <a:p>
             <a:fld id="{D997B5FA-0921-464F-AAE1-844C04324D75}" type="datetimeFigureOut">
               <a:rPr lang="zh-CN" altLang="en-US" smtClean="0"/>
-              <a:t>2026/10/14</a:t>
+              <a:t>2026/10/16</a:t>
             </a:fld>
             <a:endParaRPr lang="zh-CN" altLang="en-US"/>
           </a:p>
@@ -1226,7 +1227,7 @@
           <a:p>
             <a:fld id="{D997B5FA-0921-464F-AAE1-844C04324D75}" type="datetimeFigureOut">
               <a:rPr lang="zh-CN" altLang="en-US" smtClean="0"/>
-              <a:t>2026/10/14</a:t>
+              <a:t>2026/10/16</a:t>
             </a:fld>
             <a:endParaRPr lang="zh-CN" altLang="en-US"/>
           </a:p>
@@ -1585,7 +1586,7 @@
           <a:p>
             <a:fld id="{D997B5FA-0921-464F-AAE1-844C04324D75}" type="datetimeFigureOut">
               <a:rPr lang="zh-CN" altLang="en-US" smtClean="0"/>
-              <a:t>2026/10/14</a:t>
+              <a:t>2026/10/16</a:t>
             </a:fld>
             <a:endParaRPr lang="zh-CN" altLang="en-US"/>
           </a:p>
@@ -1697,7 +1698,7 @@
           <a:p>
             <a:fld id="{D997B5FA-0921-464F-AAE1-844C04324D75}" type="datetimeFigureOut">
               <a:rPr lang="zh-CN" altLang="en-US" smtClean="0"/>
-              <a:t>2026/10/14</a:t>
+              <a:t>2026/10/16</a:t>
             </a:fld>
             <a:endParaRPr lang="zh-CN" altLang="en-US"/>
           </a:p>
@@ -1787,7 +1788,7 @@
           <a:p>
             <a:fld id="{D997B5FA-0921-464F-AAE1-844C04324D75}" type="datetimeFigureOut">
               <a:rPr lang="zh-CN" altLang="en-US" smtClean="0"/>
-              <a:t>2026/10/14</a:t>
+              <a:t>2026/10/16</a:t>
             </a:fld>
             <a:endParaRPr lang="zh-CN" altLang="en-US"/>
           </a:p>
@@ -2057,7 +2058,7 @@
           <a:p>
             <a:fld id="{D997B5FA-0921-464F-AAE1-844C04324D75}" type="datetimeFigureOut">
               <a:rPr lang="zh-CN" altLang="en-US" smtClean="0"/>
-              <a:t>2026/10/14</a:t>
+              <a:t>2026/10/16</a:t>
             </a:fld>
             <a:endParaRPr lang="zh-CN" altLang="en-US"/>
           </a:p>
@@ -2304,7 +2305,7 @@
           <a:p>
             <a:fld id="{D997B5FA-0921-464F-AAE1-844C04324D75}" type="datetimeFigureOut">
               <a:rPr lang="zh-CN" altLang="en-US" smtClean="0"/>
-              <a:t>2026/10/14</a:t>
+              <a:t>2026/10/16</a:t>
             </a:fld>
             <a:endParaRPr lang="zh-CN" altLang="en-US"/>
           </a:p>
@@ -2510,7 +2511,7 @@
           <a:p>
             <a:fld id="{D997B5FA-0921-464F-AAE1-844C04324D75}" type="datetimeFigureOut">
               <a:rPr lang="zh-CN" altLang="en-US" smtClean="0"/>
-              <a:t>2026/10/14</a:t>
+              <a:t>2026/10/16</a:t>
             </a:fld>
             <a:endParaRPr lang="zh-CN" altLang="en-US"/>
           </a:p>
@@ -4383,6 +4384,1586 @@
         <p:cNvPr id="1" name="">
           <a:extLst>
             <a:ext uri="{FF2B5EF4-FFF2-40B4-BE49-F238E27FC236}">
+              <a16:creationId xmlns:a16="http://schemas.microsoft.com/office/drawing/2014/main" id="{D6FA83D2-6580-58C7-9C2A-B594C410D8CB}"/>
+            </a:ext>
+          </a:extLst>
+        </p:cNvPr>
+        <p:cNvGrpSpPr/>
+        <p:nvPr/>
+      </p:nvGrpSpPr>
+      <p:grpSpPr>
+        <a:xfrm>
+          <a:off x="0" y="0"/>
+          <a:ext cx="0" cy="0"/>
+          <a:chOff x="0" y="0"/>
+          <a:chExt cx="0" cy="0"/>
+        </a:xfrm>
+      </p:grpSpPr>
+      <p:sp>
+        <p:nvSpPr>
+          <p:cNvPr id="2" name="矩形: 圆角 1">
+            <a:extLst>
+              <a:ext uri="{FF2B5EF4-FFF2-40B4-BE49-F238E27FC236}">
+                <a16:creationId xmlns:a16="http://schemas.microsoft.com/office/drawing/2014/main" id="{E4656264-8E3E-0CA5-ED3D-AF12F5E59978}"/>
+              </a:ext>
+            </a:extLst>
+          </p:cNvPr>
+          <p:cNvSpPr/>
+          <p:nvPr/>
+        </p:nvSpPr>
+        <p:spPr>
+          <a:xfrm>
+            <a:off x="2702355" y="-213759"/>
+            <a:ext cx="1432560" cy="607162"/>
+          </a:xfrm>
+          <a:prstGeom prst="roundRect">
+            <a:avLst/>
+          </a:prstGeom>
+          <a:solidFill>
+            <a:schemeClr val="accent1">
+              <a:lumMod val="20000"/>
+              <a:lumOff val="80000"/>
+            </a:schemeClr>
+          </a:solidFill>
+        </p:spPr>
+        <p:style>
+          <a:lnRef idx="2">
+            <a:schemeClr val="accent1">
+              <a:shade val="15000"/>
+            </a:schemeClr>
+          </a:lnRef>
+          <a:fillRef idx="1">
+            <a:schemeClr val="accent1"/>
+          </a:fillRef>
+          <a:effectRef idx="0">
+            <a:schemeClr val="accent1"/>
+          </a:effectRef>
+          <a:fontRef idx="minor">
+            <a:schemeClr val="lt1"/>
+          </a:fontRef>
+        </p:style>
+        <p:txBody>
+          <a:bodyPr rtlCol="0" anchor="ctr"/>
+          <a:lstStyle/>
+          <a:p>
+            <a:pPr algn="ctr"/>
+            <a:r>
+              <a:rPr lang="zh-CN" altLang="en-US" dirty="0">
+                <a:solidFill>
+                  <a:schemeClr val="tx1"/>
+                </a:solidFill>
+              </a:rPr>
+              <a:t>选择</a:t>
+            </a:r>
+            <a:r>
+              <a:rPr lang="en-US" altLang="zh-CN" dirty="0">
+                <a:solidFill>
+                  <a:schemeClr val="tx1"/>
+                </a:solidFill>
+              </a:rPr>
+              <a:t>F</a:t>
+            </a:r>
+            <a:r>
+              <a:rPr lang="zh-CN" altLang="en-US" dirty="0">
+                <a:solidFill>
+                  <a:schemeClr val="tx1"/>
+                </a:solidFill>
+              </a:rPr>
+              <a:t>、</a:t>
+            </a:r>
+            <a:r>
+              <a:rPr lang="en-US" altLang="zh-CN" dirty="0">
+                <a:solidFill>
+                  <a:schemeClr val="tx1"/>
+                </a:solidFill>
+              </a:rPr>
+              <a:t>J23</a:t>
+            </a:r>
+          </a:p>
+          <a:p>
+            <a:pPr algn="ctr"/>
+            <a:r>
+              <a:rPr lang="zh-CN" altLang="en-US" dirty="0">
+                <a:solidFill>
+                  <a:schemeClr val="tx1"/>
+                </a:solidFill>
+              </a:rPr>
+              <a:t>评分</a:t>
+            </a:r>
+            <a:r>
+              <a:rPr lang="en-US" altLang="zh-CN" dirty="0">
+                <a:solidFill>
+                  <a:schemeClr val="tx1"/>
+                </a:solidFill>
+              </a:rPr>
+              <a:t>+4</a:t>
+            </a:r>
+            <a:endParaRPr lang="zh-CN" altLang="en-US" dirty="0">
+              <a:solidFill>
+                <a:schemeClr val="tx1"/>
+              </a:solidFill>
+            </a:endParaRPr>
+          </a:p>
+        </p:txBody>
+      </p:sp>
+      <p:sp>
+        <p:nvSpPr>
+          <p:cNvPr id="3" name="矩形: 圆角 2">
+            <a:extLst>
+              <a:ext uri="{FF2B5EF4-FFF2-40B4-BE49-F238E27FC236}">
+                <a16:creationId xmlns:a16="http://schemas.microsoft.com/office/drawing/2014/main" id="{CE8BA7F3-BE0C-02E9-7C60-9E47E2ACBE9A}"/>
+              </a:ext>
+            </a:extLst>
+          </p:cNvPr>
+          <p:cNvSpPr/>
+          <p:nvPr/>
+        </p:nvSpPr>
+        <p:spPr>
+          <a:xfrm>
+            <a:off x="2352595" y="773994"/>
+            <a:ext cx="2132079" cy="607162"/>
+          </a:xfrm>
+          <a:prstGeom prst="roundRect">
+            <a:avLst/>
+          </a:prstGeom>
+          <a:solidFill>
+            <a:schemeClr val="accent1">
+              <a:lumMod val="20000"/>
+              <a:lumOff val="80000"/>
+            </a:schemeClr>
+          </a:solidFill>
+          <a:ln>
+            <a:prstDash val="dash"/>
+          </a:ln>
+        </p:spPr>
+        <p:style>
+          <a:lnRef idx="2">
+            <a:schemeClr val="accent1">
+              <a:shade val="15000"/>
+            </a:schemeClr>
+          </a:lnRef>
+          <a:fillRef idx="1">
+            <a:schemeClr val="accent1"/>
+          </a:fillRef>
+          <a:effectRef idx="0">
+            <a:schemeClr val="accent1"/>
+          </a:effectRef>
+          <a:fontRef idx="minor">
+            <a:schemeClr val="lt1"/>
+          </a:fontRef>
+        </p:style>
+        <p:txBody>
+          <a:bodyPr rtlCol="0" anchor="ctr"/>
+          <a:lstStyle/>
+          <a:p>
+            <a:pPr algn="ctr"/>
+            <a:r>
+              <a:rPr lang="zh-CN" altLang="en-US" dirty="0">
+                <a:solidFill>
+                  <a:schemeClr val="tx1"/>
+                </a:solidFill>
+              </a:rPr>
+              <a:t>剩余候选</a:t>
+            </a:r>
+            <a:endParaRPr lang="en-US" altLang="zh-CN" dirty="0">
+              <a:solidFill>
+                <a:schemeClr val="tx1"/>
+              </a:solidFill>
+            </a:endParaRPr>
+          </a:p>
+          <a:p>
+            <a:pPr algn="ctr"/>
+            <a:r>
+              <a:rPr lang="en-US" altLang="zh-CN" dirty="0">
+                <a:solidFill>
+                  <a:schemeClr val="tx1"/>
+                </a:solidFill>
+              </a:rPr>
+              <a:t>J23:2;  Sf:2;  mv3:2</a:t>
+            </a:r>
+            <a:endParaRPr lang="zh-CN" altLang="en-US" dirty="0">
+              <a:solidFill>
+                <a:schemeClr val="tx1"/>
+              </a:solidFill>
+            </a:endParaRPr>
+          </a:p>
+        </p:txBody>
+      </p:sp>
+      <p:sp>
+        <p:nvSpPr>
+          <p:cNvPr id="8" name="矩形: 圆角 7">
+            <a:extLst>
+              <a:ext uri="{FF2B5EF4-FFF2-40B4-BE49-F238E27FC236}">
+                <a16:creationId xmlns:a16="http://schemas.microsoft.com/office/drawing/2014/main" id="{F1945B58-8936-7B8F-0192-5FB7BBE00157}"/>
+              </a:ext>
+            </a:extLst>
+          </p:cNvPr>
+          <p:cNvSpPr/>
+          <p:nvPr/>
+        </p:nvSpPr>
+        <p:spPr>
+          <a:xfrm>
+            <a:off x="1565601" y="1871079"/>
+            <a:ext cx="1573988" cy="607162"/>
+          </a:xfrm>
+          <a:prstGeom prst="roundRect">
+            <a:avLst/>
+          </a:prstGeom>
+          <a:solidFill>
+            <a:schemeClr val="accent1">
+              <a:lumMod val="20000"/>
+              <a:lumOff val="80000"/>
+            </a:schemeClr>
+          </a:solidFill>
+        </p:spPr>
+        <p:style>
+          <a:lnRef idx="2">
+            <a:schemeClr val="accent1">
+              <a:shade val="15000"/>
+            </a:schemeClr>
+          </a:lnRef>
+          <a:fillRef idx="1">
+            <a:schemeClr val="accent1"/>
+          </a:fillRef>
+          <a:effectRef idx="0">
+            <a:schemeClr val="accent1"/>
+          </a:effectRef>
+          <a:fontRef idx="minor">
+            <a:schemeClr val="lt1"/>
+          </a:fontRef>
+        </p:style>
+        <p:txBody>
+          <a:bodyPr rtlCol="0" anchor="ctr"/>
+          <a:lstStyle/>
+          <a:p>
+            <a:pPr algn="ctr"/>
+            <a:r>
+              <a:rPr lang="zh-CN" altLang="en-US" dirty="0">
+                <a:solidFill>
+                  <a:schemeClr val="tx1"/>
+                </a:solidFill>
+              </a:rPr>
+              <a:t>先选</a:t>
+            </a:r>
+            <a:r>
+              <a:rPr lang="en-US" altLang="zh-CN" dirty="0">
+                <a:solidFill>
+                  <a:schemeClr val="tx1"/>
+                </a:solidFill>
+              </a:rPr>
+              <a:t>J23</a:t>
+            </a:r>
+          </a:p>
+          <a:p>
+            <a:pPr algn="ctr"/>
+            <a:r>
+              <a:rPr lang="zh-CN" altLang="en-US" dirty="0">
+                <a:solidFill>
+                  <a:schemeClr val="tx1"/>
+                </a:solidFill>
+              </a:rPr>
+              <a:t>服务</a:t>
+            </a:r>
+            <a:r>
+              <a:rPr lang="en-US" altLang="zh-CN" dirty="0">
+                <a:solidFill>
+                  <a:schemeClr val="tx1"/>
+                </a:solidFill>
+              </a:rPr>
+              <a:t>mv1,mv4</a:t>
+            </a:r>
+          </a:p>
+        </p:txBody>
+      </p:sp>
+      <p:sp>
+        <p:nvSpPr>
+          <p:cNvPr id="10" name="矩形: 圆角 9">
+            <a:extLst>
+              <a:ext uri="{FF2B5EF4-FFF2-40B4-BE49-F238E27FC236}">
+                <a16:creationId xmlns:a16="http://schemas.microsoft.com/office/drawing/2014/main" id="{DAF26086-9A0F-EFB6-171A-BA4C3E986279}"/>
+              </a:ext>
+            </a:extLst>
+          </p:cNvPr>
+          <p:cNvSpPr/>
+          <p:nvPr/>
+        </p:nvSpPr>
+        <p:spPr>
+          <a:xfrm>
+            <a:off x="3697680" y="1871079"/>
+            <a:ext cx="1573988" cy="607162"/>
+          </a:xfrm>
+          <a:prstGeom prst="roundRect">
+            <a:avLst/>
+          </a:prstGeom>
+          <a:solidFill>
+            <a:schemeClr val="accent1">
+              <a:lumMod val="20000"/>
+              <a:lumOff val="80000"/>
+            </a:schemeClr>
+          </a:solidFill>
+        </p:spPr>
+        <p:style>
+          <a:lnRef idx="2">
+            <a:schemeClr val="accent1">
+              <a:shade val="15000"/>
+            </a:schemeClr>
+          </a:lnRef>
+          <a:fillRef idx="1">
+            <a:schemeClr val="accent1"/>
+          </a:fillRef>
+          <a:effectRef idx="0">
+            <a:schemeClr val="accent1"/>
+          </a:effectRef>
+          <a:fontRef idx="minor">
+            <a:schemeClr val="lt1"/>
+          </a:fontRef>
+        </p:style>
+        <p:txBody>
+          <a:bodyPr rtlCol="0" anchor="ctr"/>
+          <a:lstStyle/>
+          <a:p>
+            <a:pPr algn="ctr"/>
+            <a:r>
+              <a:rPr lang="zh-CN" altLang="en-US" dirty="0">
+                <a:solidFill>
+                  <a:schemeClr val="tx1"/>
+                </a:solidFill>
+              </a:rPr>
+              <a:t>先选</a:t>
+            </a:r>
+            <a:r>
+              <a:rPr lang="en-US" altLang="zh-CN" dirty="0">
+                <a:solidFill>
+                  <a:schemeClr val="tx1"/>
+                </a:solidFill>
+              </a:rPr>
+              <a:t>Sf</a:t>
+            </a:r>
+          </a:p>
+          <a:p>
+            <a:pPr algn="ctr"/>
+            <a:r>
+              <a:rPr lang="zh-CN" altLang="en-US" dirty="0">
+                <a:solidFill>
+                  <a:schemeClr val="tx1"/>
+                </a:solidFill>
+              </a:rPr>
+              <a:t>服务</a:t>
+            </a:r>
+            <a:r>
+              <a:rPr lang="en-US" altLang="zh-CN" dirty="0">
+                <a:solidFill>
+                  <a:schemeClr val="tx1"/>
+                </a:solidFill>
+              </a:rPr>
+              <a:t>mv1,mv2</a:t>
+            </a:r>
+          </a:p>
+        </p:txBody>
+      </p:sp>
+      <p:sp>
+        <p:nvSpPr>
+          <p:cNvPr id="12" name="矩形: 圆角 11">
+            <a:extLst>
+              <a:ext uri="{FF2B5EF4-FFF2-40B4-BE49-F238E27FC236}">
+                <a16:creationId xmlns:a16="http://schemas.microsoft.com/office/drawing/2014/main" id="{8C5E3500-8CC2-EC9A-123B-E448AD098751}"/>
+              </a:ext>
+            </a:extLst>
+          </p:cNvPr>
+          <p:cNvSpPr/>
+          <p:nvPr/>
+        </p:nvSpPr>
+        <p:spPr>
+          <a:xfrm>
+            <a:off x="1214323" y="2833377"/>
+            <a:ext cx="2033936" cy="607162"/>
+          </a:xfrm>
+          <a:prstGeom prst="roundRect">
+            <a:avLst/>
+          </a:prstGeom>
+          <a:solidFill>
+            <a:schemeClr val="accent1">
+              <a:lumMod val="20000"/>
+              <a:lumOff val="80000"/>
+            </a:schemeClr>
+          </a:solidFill>
+          <a:ln>
+            <a:prstDash val="dash"/>
+          </a:ln>
+        </p:spPr>
+        <p:style>
+          <a:lnRef idx="2">
+            <a:schemeClr val="accent1">
+              <a:shade val="15000"/>
+            </a:schemeClr>
+          </a:lnRef>
+          <a:fillRef idx="1">
+            <a:schemeClr val="accent1"/>
+          </a:fillRef>
+          <a:effectRef idx="0">
+            <a:schemeClr val="accent1"/>
+          </a:effectRef>
+          <a:fontRef idx="minor">
+            <a:schemeClr val="lt1"/>
+          </a:fontRef>
+        </p:style>
+        <p:txBody>
+          <a:bodyPr rtlCol="0" anchor="ctr"/>
+          <a:lstStyle/>
+          <a:p>
+            <a:pPr algn="ctr"/>
+            <a:r>
+              <a:rPr lang="en-US" altLang="zh-CN" dirty="0">
+                <a:solidFill>
+                  <a:schemeClr val="tx1"/>
+                </a:solidFill>
+              </a:rPr>
+              <a:t>Sf</a:t>
+            </a:r>
+            <a:r>
+              <a:rPr lang="zh-CN" altLang="en-US" dirty="0">
+                <a:solidFill>
+                  <a:schemeClr val="tx1"/>
+                </a:solidFill>
+              </a:rPr>
+              <a:t>失去</a:t>
+            </a:r>
+            <a:r>
+              <a:rPr lang="en-US" altLang="zh-CN" dirty="0">
+                <a:solidFill>
+                  <a:schemeClr val="tx1"/>
+                </a:solidFill>
+              </a:rPr>
+              <a:t>mv1:2-&gt;1  </a:t>
+            </a:r>
+          </a:p>
+          <a:p>
+            <a:pPr algn="ctr"/>
+            <a:r>
+              <a:rPr lang="en-US" altLang="zh-CN" dirty="0">
+                <a:solidFill>
+                  <a:schemeClr val="tx1"/>
+                </a:solidFill>
+              </a:rPr>
+              <a:t>mv3</a:t>
+            </a:r>
+            <a:r>
+              <a:rPr lang="zh-CN" altLang="en-US" dirty="0">
+                <a:solidFill>
+                  <a:schemeClr val="tx1"/>
+                </a:solidFill>
+              </a:rPr>
+              <a:t>失去</a:t>
+            </a:r>
+            <a:r>
+              <a:rPr lang="en-US" altLang="zh-CN" dirty="0">
+                <a:solidFill>
+                  <a:schemeClr val="tx1"/>
+                </a:solidFill>
+              </a:rPr>
+              <a:t>mv4:2-&gt;1</a:t>
+            </a:r>
+            <a:endParaRPr lang="zh-CN" altLang="en-US" dirty="0">
+              <a:solidFill>
+                <a:schemeClr val="tx1"/>
+              </a:solidFill>
+            </a:endParaRPr>
+          </a:p>
+        </p:txBody>
+      </p:sp>
+      <p:sp>
+        <p:nvSpPr>
+          <p:cNvPr id="13" name="矩形: 圆角 12">
+            <a:extLst>
+              <a:ext uri="{FF2B5EF4-FFF2-40B4-BE49-F238E27FC236}">
+                <a16:creationId xmlns:a16="http://schemas.microsoft.com/office/drawing/2014/main" id="{8888C20E-A637-72A6-982A-29DFACA68303}"/>
+              </a:ext>
+            </a:extLst>
+          </p:cNvPr>
+          <p:cNvSpPr/>
+          <p:nvPr/>
+        </p:nvSpPr>
+        <p:spPr>
+          <a:xfrm>
+            <a:off x="3551837" y="2833377"/>
+            <a:ext cx="2033936" cy="355135"/>
+          </a:xfrm>
+          <a:prstGeom prst="roundRect">
+            <a:avLst/>
+          </a:prstGeom>
+          <a:solidFill>
+            <a:schemeClr val="accent1">
+              <a:lumMod val="20000"/>
+              <a:lumOff val="80000"/>
+            </a:schemeClr>
+          </a:solidFill>
+          <a:ln>
+            <a:prstDash val="dash"/>
+          </a:ln>
+        </p:spPr>
+        <p:style>
+          <a:lnRef idx="2">
+            <a:schemeClr val="accent1">
+              <a:shade val="15000"/>
+            </a:schemeClr>
+          </a:lnRef>
+          <a:fillRef idx="1">
+            <a:schemeClr val="accent1"/>
+          </a:fillRef>
+          <a:effectRef idx="0">
+            <a:schemeClr val="accent1"/>
+          </a:effectRef>
+          <a:fontRef idx="minor">
+            <a:schemeClr val="lt1"/>
+          </a:fontRef>
+        </p:style>
+        <p:txBody>
+          <a:bodyPr rtlCol="0" anchor="ctr"/>
+          <a:lstStyle/>
+          <a:p>
+            <a:pPr algn="ctr"/>
+            <a:r>
+              <a:rPr lang="en-US" altLang="zh-CN" dirty="0">
+                <a:solidFill>
+                  <a:schemeClr val="tx1"/>
+                </a:solidFill>
+              </a:rPr>
+              <a:t>J123</a:t>
+            </a:r>
+            <a:r>
+              <a:rPr lang="zh-CN" altLang="en-US" dirty="0">
+                <a:solidFill>
+                  <a:schemeClr val="tx1"/>
+                </a:solidFill>
+              </a:rPr>
+              <a:t>失去</a:t>
+            </a:r>
+            <a:r>
+              <a:rPr lang="en-US" altLang="zh-CN" dirty="0">
+                <a:solidFill>
+                  <a:schemeClr val="tx1"/>
+                </a:solidFill>
+              </a:rPr>
+              <a:t>mv1:2-&gt;1  </a:t>
+            </a:r>
+          </a:p>
+        </p:txBody>
+      </p:sp>
+      <p:sp>
+        <p:nvSpPr>
+          <p:cNvPr id="15" name="矩形: 圆角 14">
+            <a:extLst>
+              <a:ext uri="{FF2B5EF4-FFF2-40B4-BE49-F238E27FC236}">
+                <a16:creationId xmlns:a16="http://schemas.microsoft.com/office/drawing/2014/main" id="{3EB741B9-BD0B-C2BD-832E-3A5A73496544}"/>
+              </a:ext>
+            </a:extLst>
+          </p:cNvPr>
+          <p:cNvSpPr/>
+          <p:nvPr/>
+        </p:nvSpPr>
+        <p:spPr>
+          <a:xfrm>
+            <a:off x="1274448" y="4375905"/>
+            <a:ext cx="1913685" cy="607162"/>
+          </a:xfrm>
+          <a:prstGeom prst="roundRect">
+            <a:avLst/>
+          </a:prstGeom>
+          <a:solidFill>
+            <a:schemeClr val="accent1">
+              <a:lumMod val="20000"/>
+              <a:lumOff val="80000"/>
+            </a:schemeClr>
+          </a:solidFill>
+          <a:ln>
+            <a:prstDash val="solid"/>
+          </a:ln>
+        </p:spPr>
+        <p:style>
+          <a:lnRef idx="2">
+            <a:schemeClr val="accent1">
+              <a:shade val="15000"/>
+            </a:schemeClr>
+          </a:lnRef>
+          <a:fillRef idx="1">
+            <a:schemeClr val="accent1"/>
+          </a:fillRef>
+          <a:effectRef idx="0">
+            <a:schemeClr val="accent1"/>
+          </a:effectRef>
+          <a:fontRef idx="minor">
+            <a:schemeClr val="lt1"/>
+          </a:fontRef>
+        </p:style>
+        <p:txBody>
+          <a:bodyPr rtlCol="0" anchor="ctr"/>
+          <a:lstStyle/>
+          <a:p>
+            <a:pPr algn="ctr"/>
+            <a:r>
+              <a:rPr lang="zh-CN" altLang="en-US" dirty="0">
+                <a:solidFill>
+                  <a:schemeClr val="tx1"/>
+                </a:solidFill>
+              </a:rPr>
+              <a:t>无额外共享候选</a:t>
+            </a:r>
+            <a:endParaRPr lang="en-US" altLang="zh-CN" dirty="0">
+              <a:solidFill>
+                <a:schemeClr val="tx1"/>
+              </a:solidFill>
+            </a:endParaRPr>
+          </a:p>
+          <a:p>
+            <a:pPr algn="ctr"/>
+            <a:r>
+              <a:rPr lang="zh-CN" altLang="en-US" dirty="0">
+                <a:solidFill>
+                  <a:schemeClr val="tx1"/>
+                </a:solidFill>
+              </a:rPr>
+              <a:t>补全计算路径</a:t>
+            </a:r>
+          </a:p>
+        </p:txBody>
+      </p:sp>
+      <p:sp>
+        <p:nvSpPr>
+          <p:cNvPr id="16" name="矩形: 圆角 15">
+            <a:extLst>
+              <a:ext uri="{FF2B5EF4-FFF2-40B4-BE49-F238E27FC236}">
+                <a16:creationId xmlns:a16="http://schemas.microsoft.com/office/drawing/2014/main" id="{0B887E0B-E2EA-FBAA-6B5D-69799D548CFC}"/>
+              </a:ext>
+            </a:extLst>
+          </p:cNvPr>
+          <p:cNvSpPr/>
+          <p:nvPr/>
+        </p:nvSpPr>
+        <p:spPr>
+          <a:xfrm>
+            <a:off x="3781811" y="3454294"/>
+            <a:ext cx="1573988" cy="607162"/>
+          </a:xfrm>
+          <a:prstGeom prst="roundRect">
+            <a:avLst/>
+          </a:prstGeom>
+          <a:solidFill>
+            <a:schemeClr val="accent1">
+              <a:lumMod val="20000"/>
+              <a:lumOff val="80000"/>
+            </a:schemeClr>
+          </a:solidFill>
+        </p:spPr>
+        <p:style>
+          <a:lnRef idx="2">
+            <a:schemeClr val="accent1">
+              <a:shade val="15000"/>
+            </a:schemeClr>
+          </a:lnRef>
+          <a:fillRef idx="1">
+            <a:schemeClr val="accent1"/>
+          </a:fillRef>
+          <a:effectRef idx="0">
+            <a:schemeClr val="accent1"/>
+          </a:effectRef>
+          <a:fontRef idx="minor">
+            <a:schemeClr val="lt1"/>
+          </a:fontRef>
+        </p:style>
+        <p:txBody>
+          <a:bodyPr rtlCol="0" anchor="ctr"/>
+          <a:lstStyle/>
+          <a:p>
+            <a:pPr algn="ctr"/>
+            <a:r>
+              <a:rPr lang="zh-CN" altLang="en-US" dirty="0">
+                <a:solidFill>
+                  <a:schemeClr val="tx1"/>
+                </a:solidFill>
+              </a:rPr>
+              <a:t>选择</a:t>
+            </a:r>
+            <a:r>
+              <a:rPr lang="en-US" altLang="zh-CN" dirty="0">
+                <a:solidFill>
+                  <a:schemeClr val="tx1"/>
+                </a:solidFill>
+              </a:rPr>
+              <a:t>mv3</a:t>
+            </a:r>
+          </a:p>
+          <a:p>
+            <a:pPr algn="ctr"/>
+            <a:r>
+              <a:rPr lang="zh-CN" altLang="en-US" dirty="0">
+                <a:solidFill>
+                  <a:schemeClr val="tx1"/>
+                </a:solidFill>
+              </a:rPr>
+              <a:t>服务</a:t>
+            </a:r>
+            <a:r>
+              <a:rPr lang="en-US" altLang="zh-CN" dirty="0">
+                <a:solidFill>
+                  <a:schemeClr val="tx1"/>
+                </a:solidFill>
+              </a:rPr>
+              <a:t>mv3,mv4</a:t>
+            </a:r>
+          </a:p>
+        </p:txBody>
+      </p:sp>
+      <p:sp>
+        <p:nvSpPr>
+          <p:cNvPr id="17" name="矩形: 圆角 16">
+            <a:extLst>
+              <a:ext uri="{FF2B5EF4-FFF2-40B4-BE49-F238E27FC236}">
+                <a16:creationId xmlns:a16="http://schemas.microsoft.com/office/drawing/2014/main" id="{8BF1329F-539C-8D6B-A8C2-0F387E7E4928}"/>
+              </a:ext>
+            </a:extLst>
+          </p:cNvPr>
+          <p:cNvSpPr/>
+          <p:nvPr/>
+        </p:nvSpPr>
+        <p:spPr>
+          <a:xfrm>
+            <a:off x="1414883" y="5279377"/>
+            <a:ext cx="1632814" cy="405170"/>
+          </a:xfrm>
+          <a:prstGeom prst="roundRect">
+            <a:avLst/>
+          </a:prstGeom>
+          <a:solidFill>
+            <a:schemeClr val="accent1">
+              <a:lumMod val="20000"/>
+              <a:lumOff val="80000"/>
+            </a:schemeClr>
+          </a:solidFill>
+          <a:ln>
+            <a:prstDash val="solid"/>
+          </a:ln>
+        </p:spPr>
+        <p:style>
+          <a:lnRef idx="2">
+            <a:schemeClr val="accent1">
+              <a:shade val="15000"/>
+            </a:schemeClr>
+          </a:lnRef>
+          <a:fillRef idx="1">
+            <a:schemeClr val="accent1"/>
+          </a:fillRef>
+          <a:effectRef idx="0">
+            <a:schemeClr val="accent1"/>
+          </a:effectRef>
+          <a:fontRef idx="minor">
+            <a:schemeClr val="lt1"/>
+          </a:fontRef>
+        </p:style>
+        <p:txBody>
+          <a:bodyPr rtlCol="0" anchor="ctr"/>
+          <a:lstStyle/>
+          <a:p>
+            <a:pPr algn="ctr"/>
+            <a:r>
+              <a:rPr lang="zh-CN" altLang="en-US" dirty="0">
+                <a:solidFill>
+                  <a:schemeClr val="tx1"/>
+                </a:solidFill>
+              </a:rPr>
+              <a:t>得分</a:t>
+            </a:r>
+            <a:r>
+              <a:rPr lang="en-US" altLang="zh-CN" dirty="0">
+                <a:solidFill>
+                  <a:schemeClr val="tx1"/>
+                </a:solidFill>
+              </a:rPr>
+              <a:t>:4+1=5</a:t>
+            </a:r>
+            <a:endParaRPr lang="zh-CN" altLang="en-US" dirty="0">
+              <a:solidFill>
+                <a:schemeClr val="tx1"/>
+              </a:solidFill>
+            </a:endParaRPr>
+          </a:p>
+        </p:txBody>
+      </p:sp>
+      <p:sp>
+        <p:nvSpPr>
+          <p:cNvPr id="18" name="矩形: 圆角 17">
+            <a:extLst>
+              <a:ext uri="{FF2B5EF4-FFF2-40B4-BE49-F238E27FC236}">
+                <a16:creationId xmlns:a16="http://schemas.microsoft.com/office/drawing/2014/main" id="{68BF753C-D4BC-CE63-3F4C-BDCBD15DFEEB}"/>
+              </a:ext>
+            </a:extLst>
+          </p:cNvPr>
+          <p:cNvSpPr/>
+          <p:nvPr/>
+        </p:nvSpPr>
+        <p:spPr>
+          <a:xfrm>
+            <a:off x="3752397" y="5276845"/>
+            <a:ext cx="1632814" cy="405170"/>
+          </a:xfrm>
+          <a:prstGeom prst="roundRect">
+            <a:avLst/>
+          </a:prstGeom>
+          <a:solidFill>
+            <a:schemeClr val="accent1">
+              <a:lumMod val="20000"/>
+              <a:lumOff val="80000"/>
+            </a:schemeClr>
+          </a:solidFill>
+          <a:ln>
+            <a:prstDash val="solid"/>
+          </a:ln>
+        </p:spPr>
+        <p:style>
+          <a:lnRef idx="2">
+            <a:schemeClr val="accent1">
+              <a:shade val="15000"/>
+            </a:schemeClr>
+          </a:lnRef>
+          <a:fillRef idx="1">
+            <a:schemeClr val="accent1"/>
+          </a:fillRef>
+          <a:effectRef idx="0">
+            <a:schemeClr val="accent1"/>
+          </a:effectRef>
+          <a:fontRef idx="minor">
+            <a:schemeClr val="lt1"/>
+          </a:fontRef>
+        </p:style>
+        <p:txBody>
+          <a:bodyPr rtlCol="0" anchor="ctr"/>
+          <a:lstStyle/>
+          <a:p>
+            <a:pPr algn="ctr"/>
+            <a:r>
+              <a:rPr lang="zh-CN" altLang="en-US" dirty="0">
+                <a:solidFill>
+                  <a:schemeClr val="tx1"/>
+                </a:solidFill>
+              </a:rPr>
+              <a:t>得分</a:t>
+            </a:r>
+            <a:r>
+              <a:rPr lang="en-US" altLang="zh-CN" dirty="0">
+                <a:solidFill>
+                  <a:schemeClr val="tx1"/>
+                </a:solidFill>
+              </a:rPr>
+              <a:t>:4+1+1=6</a:t>
+            </a:r>
+            <a:endParaRPr lang="zh-CN" altLang="en-US" dirty="0">
+              <a:solidFill>
+                <a:schemeClr val="tx1"/>
+              </a:solidFill>
+            </a:endParaRPr>
+          </a:p>
+        </p:txBody>
+      </p:sp>
+      <p:cxnSp>
+        <p:nvCxnSpPr>
+          <p:cNvPr id="21" name="直接箭头连接符 20">
+            <a:extLst>
+              <a:ext uri="{FF2B5EF4-FFF2-40B4-BE49-F238E27FC236}">
+                <a16:creationId xmlns:a16="http://schemas.microsoft.com/office/drawing/2014/main" id="{DF290B32-48D6-92F9-90D8-350D96E40E66}"/>
+              </a:ext>
+            </a:extLst>
+          </p:cNvPr>
+          <p:cNvCxnSpPr>
+            <a:cxnSpLocks/>
+            <a:stCxn id="2" idx="2"/>
+            <a:endCxn id="3" idx="0"/>
+          </p:cNvCxnSpPr>
+          <p:nvPr/>
+        </p:nvCxnSpPr>
+        <p:spPr>
+          <a:xfrm>
+            <a:off x="3418635" y="393403"/>
+            <a:ext cx="0" cy="380591"/>
+          </a:xfrm>
+          <a:prstGeom prst="straightConnector1">
+            <a:avLst/>
+          </a:prstGeom>
+          <a:ln>
+            <a:prstDash val="dash"/>
+            <a:tailEnd type="triangle"/>
+          </a:ln>
+        </p:spPr>
+        <p:style>
+          <a:lnRef idx="1">
+            <a:schemeClr val="accent1"/>
+          </a:lnRef>
+          <a:fillRef idx="0">
+            <a:schemeClr val="accent1"/>
+          </a:fillRef>
+          <a:effectRef idx="0">
+            <a:schemeClr val="accent1"/>
+          </a:effectRef>
+          <a:fontRef idx="minor">
+            <a:schemeClr val="tx1"/>
+          </a:fontRef>
+        </p:style>
+      </p:cxnSp>
+      <p:cxnSp>
+        <p:nvCxnSpPr>
+          <p:cNvPr id="24" name="直接箭头连接符 23">
+            <a:extLst>
+              <a:ext uri="{FF2B5EF4-FFF2-40B4-BE49-F238E27FC236}">
+                <a16:creationId xmlns:a16="http://schemas.microsoft.com/office/drawing/2014/main" id="{7939BFBA-4590-AAD4-2737-773BFDFABA9F}"/>
+              </a:ext>
+            </a:extLst>
+          </p:cNvPr>
+          <p:cNvCxnSpPr>
+            <a:cxnSpLocks/>
+            <a:stCxn id="10" idx="2"/>
+            <a:endCxn id="13" idx="0"/>
+          </p:cNvCxnSpPr>
+          <p:nvPr/>
+        </p:nvCxnSpPr>
+        <p:spPr>
+          <a:xfrm>
+            <a:off x="4484674" y="2478241"/>
+            <a:ext cx="84131" cy="355136"/>
+          </a:xfrm>
+          <a:prstGeom prst="straightConnector1">
+            <a:avLst/>
+          </a:prstGeom>
+          <a:ln>
+            <a:prstDash val="dash"/>
+            <a:tailEnd type="triangle"/>
+          </a:ln>
+        </p:spPr>
+        <p:style>
+          <a:lnRef idx="1">
+            <a:schemeClr val="accent1"/>
+          </a:lnRef>
+          <a:fillRef idx="0">
+            <a:schemeClr val="accent1"/>
+          </a:fillRef>
+          <a:effectRef idx="0">
+            <a:schemeClr val="accent1"/>
+          </a:effectRef>
+          <a:fontRef idx="minor">
+            <a:schemeClr val="tx1"/>
+          </a:fontRef>
+        </p:style>
+      </p:cxnSp>
+      <p:cxnSp>
+        <p:nvCxnSpPr>
+          <p:cNvPr id="26" name="连接符: 肘形 25">
+            <a:extLst>
+              <a:ext uri="{FF2B5EF4-FFF2-40B4-BE49-F238E27FC236}">
+                <a16:creationId xmlns:a16="http://schemas.microsoft.com/office/drawing/2014/main" id="{E2994BA1-E63C-41C2-5603-A51DC42CBE50}"/>
+              </a:ext>
+            </a:extLst>
+          </p:cNvPr>
+          <p:cNvCxnSpPr>
+            <a:cxnSpLocks/>
+            <a:stCxn id="3" idx="2"/>
+            <a:endCxn id="8" idx="0"/>
+          </p:cNvCxnSpPr>
+          <p:nvPr/>
+        </p:nvCxnSpPr>
+        <p:spPr>
+          <a:xfrm rot="5400000">
+            <a:off x="2640654" y="1093097"/>
+            <a:ext cx="489923" cy="1066040"/>
+          </a:xfrm>
+          <a:prstGeom prst="bentConnector3">
+            <a:avLst>
+              <a:gd name="adj1" fmla="val 50000"/>
+            </a:avLst>
+          </a:prstGeom>
+          <a:ln>
+            <a:tailEnd type="triangle"/>
+          </a:ln>
+        </p:spPr>
+        <p:style>
+          <a:lnRef idx="1">
+            <a:schemeClr val="accent1"/>
+          </a:lnRef>
+          <a:fillRef idx="0">
+            <a:schemeClr val="accent1"/>
+          </a:fillRef>
+          <a:effectRef idx="0">
+            <a:schemeClr val="accent1"/>
+          </a:effectRef>
+          <a:fontRef idx="minor">
+            <a:schemeClr val="tx1"/>
+          </a:fontRef>
+        </p:style>
+      </p:cxnSp>
+      <p:cxnSp>
+        <p:nvCxnSpPr>
+          <p:cNvPr id="30" name="连接符: 肘形 29">
+            <a:extLst>
+              <a:ext uri="{FF2B5EF4-FFF2-40B4-BE49-F238E27FC236}">
+                <a16:creationId xmlns:a16="http://schemas.microsoft.com/office/drawing/2014/main" id="{B4A26FB3-E28F-F5B8-435D-43D895C59304}"/>
+              </a:ext>
+            </a:extLst>
+          </p:cNvPr>
+          <p:cNvCxnSpPr>
+            <a:cxnSpLocks/>
+            <a:stCxn id="3" idx="2"/>
+            <a:endCxn id="10" idx="0"/>
+          </p:cNvCxnSpPr>
+          <p:nvPr/>
+        </p:nvCxnSpPr>
+        <p:spPr>
+          <a:xfrm rot="16200000" flipH="1">
+            <a:off x="3706693" y="1093097"/>
+            <a:ext cx="489923" cy="1066039"/>
+          </a:xfrm>
+          <a:prstGeom prst="bentConnector3">
+            <a:avLst>
+              <a:gd name="adj1" fmla="val 50000"/>
+            </a:avLst>
+          </a:prstGeom>
+          <a:ln>
+            <a:tailEnd type="triangle"/>
+          </a:ln>
+        </p:spPr>
+        <p:style>
+          <a:lnRef idx="1">
+            <a:schemeClr val="accent1"/>
+          </a:lnRef>
+          <a:fillRef idx="0">
+            <a:schemeClr val="accent1"/>
+          </a:fillRef>
+          <a:effectRef idx="0">
+            <a:schemeClr val="accent1"/>
+          </a:effectRef>
+          <a:fontRef idx="minor">
+            <a:schemeClr val="tx1"/>
+          </a:fontRef>
+        </p:style>
+      </p:cxnSp>
+      <p:cxnSp>
+        <p:nvCxnSpPr>
+          <p:cNvPr id="43" name="直接箭头连接符 42">
+            <a:extLst>
+              <a:ext uri="{FF2B5EF4-FFF2-40B4-BE49-F238E27FC236}">
+                <a16:creationId xmlns:a16="http://schemas.microsoft.com/office/drawing/2014/main" id="{0A70F13B-1FB0-1FF0-DC83-313A468A4894}"/>
+              </a:ext>
+            </a:extLst>
+          </p:cNvPr>
+          <p:cNvCxnSpPr>
+            <a:cxnSpLocks/>
+            <a:stCxn id="8" idx="2"/>
+            <a:endCxn id="12" idx="0"/>
+          </p:cNvCxnSpPr>
+          <p:nvPr/>
+        </p:nvCxnSpPr>
+        <p:spPr>
+          <a:xfrm flipH="1">
+            <a:off x="2231291" y="2478241"/>
+            <a:ext cx="121304" cy="355136"/>
+          </a:xfrm>
+          <a:prstGeom prst="straightConnector1">
+            <a:avLst/>
+          </a:prstGeom>
+          <a:ln>
+            <a:prstDash val="dash"/>
+            <a:tailEnd type="triangle"/>
+          </a:ln>
+        </p:spPr>
+        <p:style>
+          <a:lnRef idx="1">
+            <a:schemeClr val="accent1"/>
+          </a:lnRef>
+          <a:fillRef idx="0">
+            <a:schemeClr val="accent1"/>
+          </a:fillRef>
+          <a:effectRef idx="0">
+            <a:schemeClr val="accent1"/>
+          </a:effectRef>
+          <a:fontRef idx="minor">
+            <a:schemeClr val="tx1"/>
+          </a:fontRef>
+        </p:style>
+      </p:cxnSp>
+      <p:sp>
+        <p:nvSpPr>
+          <p:cNvPr id="51" name="矩形: 圆角 50">
+            <a:extLst>
+              <a:ext uri="{FF2B5EF4-FFF2-40B4-BE49-F238E27FC236}">
+                <a16:creationId xmlns:a16="http://schemas.microsoft.com/office/drawing/2014/main" id="{04A687B7-DEFF-403D-481F-0EDA8B544F86}"/>
+              </a:ext>
+            </a:extLst>
+          </p:cNvPr>
+          <p:cNvSpPr/>
+          <p:nvPr/>
+        </p:nvSpPr>
+        <p:spPr>
+          <a:xfrm>
+            <a:off x="3611962" y="4375905"/>
+            <a:ext cx="1913685" cy="607162"/>
+          </a:xfrm>
+          <a:prstGeom prst="roundRect">
+            <a:avLst/>
+          </a:prstGeom>
+          <a:solidFill>
+            <a:schemeClr val="accent1">
+              <a:lumMod val="20000"/>
+              <a:lumOff val="80000"/>
+            </a:schemeClr>
+          </a:solidFill>
+          <a:ln>
+            <a:prstDash val="solid"/>
+          </a:ln>
+        </p:spPr>
+        <p:style>
+          <a:lnRef idx="2">
+            <a:schemeClr val="accent1">
+              <a:shade val="15000"/>
+            </a:schemeClr>
+          </a:lnRef>
+          <a:fillRef idx="1">
+            <a:schemeClr val="accent1"/>
+          </a:fillRef>
+          <a:effectRef idx="0">
+            <a:schemeClr val="accent1"/>
+          </a:effectRef>
+          <a:fontRef idx="minor">
+            <a:schemeClr val="lt1"/>
+          </a:fontRef>
+        </p:style>
+        <p:txBody>
+          <a:bodyPr rtlCol="0" anchor="ctr"/>
+          <a:lstStyle/>
+          <a:p>
+            <a:pPr algn="ctr"/>
+            <a:r>
+              <a:rPr lang="zh-CN" altLang="en-US" dirty="0">
+                <a:solidFill>
+                  <a:schemeClr val="tx1"/>
+                </a:solidFill>
+              </a:rPr>
+              <a:t>无额外共享候选</a:t>
+            </a:r>
+            <a:endParaRPr lang="en-US" altLang="zh-CN" dirty="0">
+              <a:solidFill>
+                <a:schemeClr val="tx1"/>
+              </a:solidFill>
+            </a:endParaRPr>
+          </a:p>
+          <a:p>
+            <a:pPr algn="ctr"/>
+            <a:r>
+              <a:rPr lang="zh-CN" altLang="en-US" dirty="0">
+                <a:solidFill>
+                  <a:schemeClr val="tx1"/>
+                </a:solidFill>
+              </a:rPr>
+              <a:t>补全计算路径</a:t>
+            </a:r>
+          </a:p>
+        </p:txBody>
+      </p:sp>
+      <p:cxnSp>
+        <p:nvCxnSpPr>
+          <p:cNvPr id="54" name="直接箭头连接符 53">
+            <a:extLst>
+              <a:ext uri="{FF2B5EF4-FFF2-40B4-BE49-F238E27FC236}">
+                <a16:creationId xmlns:a16="http://schemas.microsoft.com/office/drawing/2014/main" id="{4301AD32-7BC1-C665-C394-6662BF027351}"/>
+              </a:ext>
+            </a:extLst>
+          </p:cNvPr>
+          <p:cNvCxnSpPr>
+            <a:cxnSpLocks/>
+            <a:stCxn id="13" idx="2"/>
+            <a:endCxn id="16" idx="0"/>
+          </p:cNvCxnSpPr>
+          <p:nvPr/>
+        </p:nvCxnSpPr>
+        <p:spPr>
+          <a:xfrm>
+            <a:off x="4568805" y="3188512"/>
+            <a:ext cx="0" cy="265782"/>
+          </a:xfrm>
+          <a:prstGeom prst="straightConnector1">
+            <a:avLst/>
+          </a:prstGeom>
+          <a:ln>
+            <a:tailEnd type="triangle"/>
+          </a:ln>
+        </p:spPr>
+        <p:style>
+          <a:lnRef idx="1">
+            <a:schemeClr val="accent1"/>
+          </a:lnRef>
+          <a:fillRef idx="0">
+            <a:schemeClr val="accent1"/>
+          </a:fillRef>
+          <a:effectRef idx="0">
+            <a:schemeClr val="accent1"/>
+          </a:effectRef>
+          <a:fontRef idx="minor">
+            <a:schemeClr val="tx1"/>
+          </a:fontRef>
+        </p:style>
+      </p:cxnSp>
+      <p:cxnSp>
+        <p:nvCxnSpPr>
+          <p:cNvPr id="59" name="直接箭头连接符 58">
+            <a:extLst>
+              <a:ext uri="{FF2B5EF4-FFF2-40B4-BE49-F238E27FC236}">
+                <a16:creationId xmlns:a16="http://schemas.microsoft.com/office/drawing/2014/main" id="{1FE91423-78A2-EE93-A6E7-F25D04CED864}"/>
+              </a:ext>
+            </a:extLst>
+          </p:cNvPr>
+          <p:cNvCxnSpPr>
+            <a:cxnSpLocks/>
+            <a:stCxn id="16" idx="2"/>
+            <a:endCxn id="51" idx="0"/>
+          </p:cNvCxnSpPr>
+          <p:nvPr/>
+        </p:nvCxnSpPr>
+        <p:spPr>
+          <a:xfrm>
+            <a:off x="4568805" y="4061456"/>
+            <a:ext cx="0" cy="314449"/>
+          </a:xfrm>
+          <a:prstGeom prst="straightConnector1">
+            <a:avLst/>
+          </a:prstGeom>
+          <a:ln>
+            <a:tailEnd type="triangle"/>
+          </a:ln>
+        </p:spPr>
+        <p:style>
+          <a:lnRef idx="1">
+            <a:schemeClr val="accent1"/>
+          </a:lnRef>
+          <a:fillRef idx="0">
+            <a:schemeClr val="accent1"/>
+          </a:fillRef>
+          <a:effectRef idx="0">
+            <a:schemeClr val="accent1"/>
+          </a:effectRef>
+          <a:fontRef idx="minor">
+            <a:schemeClr val="tx1"/>
+          </a:fontRef>
+        </p:style>
+      </p:cxnSp>
+      <p:cxnSp>
+        <p:nvCxnSpPr>
+          <p:cNvPr id="64" name="直接箭头连接符 63">
+            <a:extLst>
+              <a:ext uri="{FF2B5EF4-FFF2-40B4-BE49-F238E27FC236}">
+                <a16:creationId xmlns:a16="http://schemas.microsoft.com/office/drawing/2014/main" id="{C0772217-F7EF-429D-EF5C-EC072E475B0E}"/>
+              </a:ext>
+            </a:extLst>
+          </p:cNvPr>
+          <p:cNvCxnSpPr>
+            <a:cxnSpLocks/>
+            <a:stCxn id="12" idx="2"/>
+            <a:endCxn id="15" idx="0"/>
+          </p:cNvCxnSpPr>
+          <p:nvPr/>
+        </p:nvCxnSpPr>
+        <p:spPr>
+          <a:xfrm>
+            <a:off x="2231291" y="3440539"/>
+            <a:ext cx="0" cy="935366"/>
+          </a:xfrm>
+          <a:prstGeom prst="straightConnector1">
+            <a:avLst/>
+          </a:prstGeom>
+          <a:ln>
+            <a:tailEnd type="triangle"/>
+          </a:ln>
+        </p:spPr>
+        <p:style>
+          <a:lnRef idx="1">
+            <a:schemeClr val="accent1"/>
+          </a:lnRef>
+          <a:fillRef idx="0">
+            <a:schemeClr val="accent1"/>
+          </a:fillRef>
+          <a:effectRef idx="0">
+            <a:schemeClr val="accent1"/>
+          </a:effectRef>
+          <a:fontRef idx="minor">
+            <a:schemeClr val="tx1"/>
+          </a:fontRef>
+        </p:style>
+      </p:cxnSp>
+      <p:cxnSp>
+        <p:nvCxnSpPr>
+          <p:cNvPr id="69" name="直接箭头连接符 68">
+            <a:extLst>
+              <a:ext uri="{FF2B5EF4-FFF2-40B4-BE49-F238E27FC236}">
+                <a16:creationId xmlns:a16="http://schemas.microsoft.com/office/drawing/2014/main" id="{5509C37D-71B7-F6F9-7587-29B9BC4E977F}"/>
+              </a:ext>
+            </a:extLst>
+          </p:cNvPr>
+          <p:cNvCxnSpPr>
+            <a:cxnSpLocks/>
+            <a:stCxn id="15" idx="2"/>
+            <a:endCxn id="17" idx="0"/>
+          </p:cNvCxnSpPr>
+          <p:nvPr/>
+        </p:nvCxnSpPr>
+        <p:spPr>
+          <a:xfrm flipH="1">
+            <a:off x="2231290" y="4983067"/>
+            <a:ext cx="1" cy="296310"/>
+          </a:xfrm>
+          <a:prstGeom prst="straightConnector1">
+            <a:avLst/>
+          </a:prstGeom>
+          <a:ln>
+            <a:tailEnd type="triangle"/>
+          </a:ln>
+        </p:spPr>
+        <p:style>
+          <a:lnRef idx="1">
+            <a:schemeClr val="accent1"/>
+          </a:lnRef>
+          <a:fillRef idx="0">
+            <a:schemeClr val="accent1"/>
+          </a:fillRef>
+          <a:effectRef idx="0">
+            <a:schemeClr val="accent1"/>
+          </a:effectRef>
+          <a:fontRef idx="minor">
+            <a:schemeClr val="tx1"/>
+          </a:fontRef>
+        </p:style>
+      </p:cxnSp>
+      <p:cxnSp>
+        <p:nvCxnSpPr>
+          <p:cNvPr id="77" name="直接箭头连接符 76">
+            <a:extLst>
+              <a:ext uri="{FF2B5EF4-FFF2-40B4-BE49-F238E27FC236}">
+                <a16:creationId xmlns:a16="http://schemas.microsoft.com/office/drawing/2014/main" id="{C905AF2A-168E-8D9E-4969-98442B578F06}"/>
+              </a:ext>
+            </a:extLst>
+          </p:cNvPr>
+          <p:cNvCxnSpPr>
+            <a:cxnSpLocks/>
+            <a:stCxn id="51" idx="2"/>
+            <a:endCxn id="18" idx="0"/>
+          </p:cNvCxnSpPr>
+          <p:nvPr/>
+        </p:nvCxnSpPr>
+        <p:spPr>
+          <a:xfrm flipH="1">
+            <a:off x="4568804" y="4983067"/>
+            <a:ext cx="1" cy="293778"/>
+          </a:xfrm>
+          <a:prstGeom prst="straightConnector1">
+            <a:avLst/>
+          </a:prstGeom>
+          <a:ln>
+            <a:tailEnd type="triangle"/>
+          </a:ln>
+        </p:spPr>
+        <p:style>
+          <a:lnRef idx="1">
+            <a:schemeClr val="accent1"/>
+          </a:lnRef>
+          <a:fillRef idx="0">
+            <a:schemeClr val="accent1"/>
+          </a:fillRef>
+          <a:effectRef idx="0">
+            <a:schemeClr val="accent1"/>
+          </a:effectRef>
+          <a:fontRef idx="minor">
+            <a:schemeClr val="tx1"/>
+          </a:fontRef>
+        </p:style>
+      </p:cxnSp>
+      <p:sp>
+        <p:nvSpPr>
+          <p:cNvPr id="86" name="矩形: 圆角 85">
+            <a:extLst>
+              <a:ext uri="{FF2B5EF4-FFF2-40B4-BE49-F238E27FC236}">
+                <a16:creationId xmlns:a16="http://schemas.microsoft.com/office/drawing/2014/main" id="{3E75D49A-89C3-6C10-AF47-771304924F6E}"/>
+              </a:ext>
+            </a:extLst>
+          </p:cNvPr>
+          <p:cNvSpPr/>
+          <p:nvPr/>
+        </p:nvSpPr>
+        <p:spPr>
+          <a:xfrm>
+            <a:off x="2502101" y="6263089"/>
+            <a:ext cx="1632814" cy="405170"/>
+          </a:xfrm>
+          <a:prstGeom prst="roundRect">
+            <a:avLst/>
+          </a:prstGeom>
+          <a:solidFill>
+            <a:schemeClr val="accent1">
+              <a:lumMod val="20000"/>
+              <a:lumOff val="80000"/>
+            </a:schemeClr>
+          </a:solidFill>
+          <a:ln>
+            <a:prstDash val="solid"/>
+          </a:ln>
+        </p:spPr>
+        <p:style>
+          <a:lnRef idx="2">
+            <a:schemeClr val="accent1">
+              <a:shade val="15000"/>
+            </a:schemeClr>
+          </a:lnRef>
+          <a:fillRef idx="1">
+            <a:schemeClr val="accent1"/>
+          </a:fillRef>
+          <a:effectRef idx="0">
+            <a:schemeClr val="accent1"/>
+          </a:effectRef>
+          <a:fontRef idx="minor">
+            <a:schemeClr val="lt1"/>
+          </a:fontRef>
+        </p:style>
+        <p:txBody>
+          <a:bodyPr rtlCol="0" anchor="ctr"/>
+          <a:lstStyle/>
+          <a:p>
+            <a:pPr algn="ctr"/>
+            <a:r>
+              <a:rPr lang="zh-CN" altLang="en-US" dirty="0">
+                <a:solidFill>
+                  <a:schemeClr val="tx1"/>
+                </a:solidFill>
+              </a:rPr>
+              <a:t>选择</a:t>
+            </a:r>
+            <a:r>
+              <a:rPr lang="en-US" altLang="zh-CN" dirty="0">
+                <a:solidFill>
+                  <a:schemeClr val="tx1"/>
+                </a:solidFill>
+              </a:rPr>
+              <a:t>Sf,mv3</a:t>
+            </a:r>
+            <a:endParaRPr lang="zh-CN" altLang="en-US" dirty="0">
+              <a:solidFill>
+                <a:schemeClr val="tx1"/>
+              </a:solidFill>
+            </a:endParaRPr>
+          </a:p>
+        </p:txBody>
+      </p:sp>
+      <p:cxnSp>
+        <p:nvCxnSpPr>
+          <p:cNvPr id="90" name="连接符: 肘形 89">
+            <a:extLst>
+              <a:ext uri="{FF2B5EF4-FFF2-40B4-BE49-F238E27FC236}">
+                <a16:creationId xmlns:a16="http://schemas.microsoft.com/office/drawing/2014/main" id="{59CD1A2F-63A1-AAA9-9BD5-2634B96FCCDC}"/>
+              </a:ext>
+            </a:extLst>
+          </p:cNvPr>
+          <p:cNvCxnSpPr>
+            <a:cxnSpLocks/>
+            <a:stCxn id="17" idx="2"/>
+            <a:endCxn id="86" idx="0"/>
+          </p:cNvCxnSpPr>
+          <p:nvPr/>
+        </p:nvCxnSpPr>
+        <p:spPr>
+          <a:xfrm rot="16200000" flipH="1">
+            <a:off x="2485628" y="5430209"/>
+            <a:ext cx="578542" cy="1087218"/>
+          </a:xfrm>
+          <a:prstGeom prst="bentConnector3">
+            <a:avLst>
+              <a:gd name="adj1" fmla="val 50000"/>
+            </a:avLst>
+          </a:prstGeom>
+          <a:ln>
+            <a:tailEnd type="triangle"/>
+          </a:ln>
+        </p:spPr>
+        <p:style>
+          <a:lnRef idx="1">
+            <a:schemeClr val="accent1"/>
+          </a:lnRef>
+          <a:fillRef idx="0">
+            <a:schemeClr val="accent1"/>
+          </a:fillRef>
+          <a:effectRef idx="0">
+            <a:schemeClr val="accent1"/>
+          </a:effectRef>
+          <a:fontRef idx="minor">
+            <a:schemeClr val="tx1"/>
+          </a:fontRef>
+        </p:style>
+      </p:cxnSp>
+      <p:cxnSp>
+        <p:nvCxnSpPr>
+          <p:cNvPr id="94" name="连接符: 肘形 93">
+            <a:extLst>
+              <a:ext uri="{FF2B5EF4-FFF2-40B4-BE49-F238E27FC236}">
+                <a16:creationId xmlns:a16="http://schemas.microsoft.com/office/drawing/2014/main" id="{54A2EF3D-85AF-7701-4119-DEE5050E35B7}"/>
+              </a:ext>
+            </a:extLst>
+          </p:cNvPr>
+          <p:cNvCxnSpPr>
+            <a:cxnSpLocks/>
+            <a:stCxn id="18" idx="2"/>
+            <a:endCxn id="86" idx="0"/>
+          </p:cNvCxnSpPr>
+          <p:nvPr/>
+        </p:nvCxnSpPr>
+        <p:spPr>
+          <a:xfrm rot="5400000">
+            <a:off x="3653119" y="5347404"/>
+            <a:ext cx="581074" cy="1250296"/>
+          </a:xfrm>
+          <a:prstGeom prst="bentConnector3">
+            <a:avLst>
+              <a:gd name="adj1" fmla="val 50000"/>
+            </a:avLst>
+          </a:prstGeom>
+          <a:ln>
+            <a:tailEnd type="triangle"/>
+          </a:ln>
+        </p:spPr>
+        <p:style>
+          <a:lnRef idx="1">
+            <a:schemeClr val="accent1"/>
+          </a:lnRef>
+          <a:fillRef idx="0">
+            <a:schemeClr val="accent1"/>
+          </a:fillRef>
+          <a:effectRef idx="0">
+            <a:schemeClr val="accent1"/>
+          </a:effectRef>
+          <a:fontRef idx="minor">
+            <a:schemeClr val="tx1"/>
+          </a:fontRef>
+        </p:style>
+      </p:cxnSp>
+    </p:spTree>
+    <p:extLst>
+      <p:ext uri="{BB962C8B-B14F-4D97-AF65-F5344CB8AC3E}">
+        <p14:creationId xmlns:p14="http://schemas.microsoft.com/office/powerpoint/2010/main" val="1758261970"/>
+      </p:ext>
+    </p:extLst>
+  </p:cSld>
+  <p:clrMapOvr>
+    <a:masterClrMapping/>
+  </p:clrMapOvr>
+</p:sld>
+</file>
+
+<file path=ppt/slides/slide11.xml><?xml version="1.0" encoding="utf-8"?>
+<p:sld xmlns:a="http://schemas.openxmlformats.org/drawingml/2006/main" xmlns:r="http://schemas.openxmlformats.org/officeDocument/2006/relationships" xmlns:p="http://schemas.openxmlformats.org/presentationml/2006/main">
+  <p:cSld>
+    <p:spTree>
+      <p:nvGrpSpPr>
+        <p:cNvPr id="1" name="">
+          <a:extLst>
+            <a:ext uri="{FF2B5EF4-FFF2-40B4-BE49-F238E27FC236}">
               <a16:creationId xmlns:a16="http://schemas.microsoft.com/office/drawing/2014/main" id="{38F1CED7-6E16-AA98-2FC1-FC496134EAD8}"/>
             </a:ext>
           </a:extLst>
@@ -5998,7 +7579,7 @@
 </p:sld>
 </file>
 
-<file path=ppt/slides/slide11.xml><?xml version="1.0" encoding="utf-8"?>
+<file path=ppt/slides/slide12.xml><?xml version="1.0" encoding="utf-8"?>
 <p:sld xmlns:a="http://schemas.openxmlformats.org/drawingml/2006/main" xmlns:r="http://schemas.openxmlformats.org/officeDocument/2006/relationships" xmlns:p="http://schemas.openxmlformats.org/presentationml/2006/main">
   <p:cSld>
     <p:spTree>
@@ -6169,7 +7750,7 @@
 </p:sld>
 </file>
 
-<file path=ppt/slides/slide12.xml><?xml version="1.0" encoding="utf-8"?>
+<file path=ppt/slides/slide13.xml><?xml version="1.0" encoding="utf-8"?>
 <p:sld xmlns:a="http://schemas.openxmlformats.org/drawingml/2006/main" xmlns:r="http://schemas.openxmlformats.org/officeDocument/2006/relationships" xmlns:p="http://schemas.openxmlformats.org/presentationml/2006/main">
   <p:cSld>
     <p:spTree>
@@ -11690,8 +13271,8 @@
           </a:p>
         </p:txBody>
       </p:sp>
-      <mc:AlternateContent xmlns:mc="http://schemas.openxmlformats.org/markup-compatibility/2006">
-        <mc:Choice xmlns:a14="http://schemas.microsoft.com/office/drawing/2010/main" Requires="a14">
+      <mc:AlternateContent xmlns:mc="http://schemas.openxmlformats.org/markup-compatibility/2006" xmlns:a14="http://schemas.microsoft.com/office/drawing/2010/main">
+        <mc:Choice Requires="a14">
           <p:sp>
             <p:nvSpPr>
               <p:cNvPr id="5" name="文本框 4">
@@ -12724,7 +14305,7 @@
             </p:txBody>
           </p:sp>
         </mc:Choice>
-        <mc:Fallback>
+        <mc:Fallback xmlns="">
           <p:sp>
             <p:nvSpPr>
               <p:cNvPr id="5" name="文本框 4">
@@ -13704,42 +15285,6 @@
       </p:pic>
       <p:pic>
         <p:nvPicPr>
-          <p:cNvPr id="9" name="图片 8">
-            <a:extLst>
-              <a:ext uri="{FF2B5EF4-FFF2-40B4-BE49-F238E27FC236}">
-                <a16:creationId xmlns:a16="http://schemas.microsoft.com/office/drawing/2014/main" id="{18CF3892-5F3B-652F-85A0-CED746D3F3D3}"/>
-              </a:ext>
-            </a:extLst>
-          </p:cNvPr>
-          <p:cNvPicPr>
-            <a:picLocks noChangeAspect="1"/>
-          </p:cNvPicPr>
-          <p:nvPr/>
-        </p:nvPicPr>
-        <p:blipFill>
-          <a:blip r:embed="rId5" cstate="print">
-            <a:extLst>
-              <a:ext uri="{28A0092B-C50C-407E-A947-70E740481C1C}">
-                <a14:useLocalDpi xmlns:a14="http://schemas.microsoft.com/office/drawing/2010/main" val="0"/>
-              </a:ext>
-            </a:extLst>
-          </a:blip>
-          <a:stretch>
-            <a:fillRect/>
-          </a:stretch>
-        </p:blipFill>
-        <p:spPr>
-          <a:xfrm>
-            <a:off x="6297960" y="1227940"/>
-            <a:ext cx="5378280" cy="952724"/>
-          </a:xfrm>
-          <a:prstGeom prst="rect">
-            <a:avLst/>
-          </a:prstGeom>
-        </p:spPr>
-      </p:pic>
-      <p:pic>
-        <p:nvPicPr>
           <p:cNvPr id="15" name="图片 14">
             <a:extLst>
               <a:ext uri="{FF2B5EF4-FFF2-40B4-BE49-F238E27FC236}">
@@ -13753,7 +15298,7 @@
           <p:nvPr/>
         </p:nvPicPr>
         <p:blipFill>
-          <a:blip r:embed="rId6" cstate="print">
+          <a:blip r:embed="rId5" cstate="print">
             <a:extLst>
               <a:ext uri="{28A0092B-C50C-407E-A947-70E740481C1C}">
                 <a14:useLocalDpi xmlns:a14="http://schemas.microsoft.com/office/drawing/2010/main" val="0"/>
@@ -13789,7 +15334,7 @@
           <p:nvPr/>
         </p:nvPicPr>
         <p:blipFill>
-          <a:blip r:embed="rId7" cstate="print">
+          <a:blip r:embed="rId6" cstate="print">
             <a:extLst>
               <a:ext uri="{28A0092B-C50C-407E-A947-70E740481C1C}">
                 <a14:useLocalDpi xmlns:a14="http://schemas.microsoft.com/office/drawing/2010/main" val="0"/>
@@ -13810,6 +15355,42 @@
           </a:prstGeom>
         </p:spPr>
       </p:pic>
+      <p:pic>
+        <p:nvPicPr>
+          <p:cNvPr id="6" name="图片 5">
+            <a:extLst>
+              <a:ext uri="{FF2B5EF4-FFF2-40B4-BE49-F238E27FC236}">
+                <a16:creationId xmlns:a16="http://schemas.microsoft.com/office/drawing/2014/main" id="{DD4222B3-EF94-2840-4248-987FD49DA582}"/>
+              </a:ext>
+            </a:extLst>
+          </p:cNvPr>
+          <p:cNvPicPr>
+            <a:picLocks noChangeAspect="1"/>
+          </p:cNvPicPr>
+          <p:nvPr/>
+        </p:nvPicPr>
+        <p:blipFill>
+          <a:blip r:embed="rId7" cstate="print">
+            <a:extLst>
+              <a:ext uri="{28A0092B-C50C-407E-A947-70E740481C1C}">
+                <a14:useLocalDpi xmlns:a14="http://schemas.microsoft.com/office/drawing/2010/main" val="0"/>
+              </a:ext>
+            </a:extLst>
+          </a:blip>
+          <a:stretch>
+            <a:fillRect/>
+          </a:stretch>
+        </p:blipFill>
+        <p:spPr>
+          <a:xfrm>
+            <a:off x="6165404" y="1224800"/>
+            <a:ext cx="5321762" cy="918384"/>
+          </a:xfrm>
+          <a:prstGeom prst="rect">
+            <a:avLst/>
+          </a:prstGeom>
+        </p:spPr>
+      </p:pic>
     </p:spTree>
     <p:extLst>
       <p:ext uri="{BB962C8B-B14F-4D97-AF65-F5344CB8AC3E}">
@@ -13824,6 +15405,161 @@
 </file>
 
 <file path=ppt/slides/slide4.xml><?xml version="1.0" encoding="utf-8"?>
+<p:sld xmlns:a="http://schemas.openxmlformats.org/drawingml/2006/main" xmlns:r="http://schemas.openxmlformats.org/officeDocument/2006/relationships" xmlns:p="http://schemas.openxmlformats.org/presentationml/2006/main">
+  <p:cSld>
+    <p:spTree>
+      <p:nvGrpSpPr>
+        <p:cNvPr id="1" name=""/>
+        <p:cNvGrpSpPr/>
+        <p:nvPr/>
+      </p:nvGrpSpPr>
+      <p:grpSpPr>
+        <a:xfrm>
+          <a:off x="0" y="0"/>
+          <a:ext cx="0" cy="0"/>
+          <a:chOff x="0" y="0"/>
+          <a:chExt cx="0" cy="0"/>
+        </a:xfrm>
+      </p:grpSpPr>
+      <p:sp>
+        <p:nvSpPr>
+          <p:cNvPr id="3" name="内容占位符 2">
+            <a:extLst>
+              <a:ext uri="{FF2B5EF4-FFF2-40B4-BE49-F238E27FC236}">
+                <a16:creationId xmlns:a16="http://schemas.microsoft.com/office/drawing/2014/main" id="{27E2A616-B2A1-C93D-88C9-7ACC26943299}"/>
+              </a:ext>
+            </a:extLst>
+          </p:cNvPr>
+          <p:cNvSpPr>
+            <a:spLocks noGrp="1"/>
+          </p:cNvSpPr>
+          <p:nvPr>
+            <p:ph idx="1"/>
+          </p:nvPr>
+        </p:nvSpPr>
+        <p:spPr>
+          <a:xfrm>
+            <a:off x="729343" y="606425"/>
+            <a:ext cx="10515600" cy="4351338"/>
+          </a:xfrm>
+        </p:spPr>
+        <p:txBody>
+          <a:bodyPr>
+            <a:normAutofit/>
+          </a:bodyPr>
+          <a:lstStyle/>
+          <a:p>
+            <a:r>
+              <a:rPr lang="zh-CN" altLang="en-US" sz="1200" b="1" dirty="0"/>
+              <a:t>方案优势</a:t>
+            </a:r>
+            <a:endParaRPr lang="zh-CN" altLang="en-US" sz="1200" dirty="0"/>
+          </a:p>
+          <a:p>
+            <a:r>
+              <a:rPr lang="zh-CN" altLang="en-US" sz="1200" b="1" dirty="0"/>
+              <a:t>支持跨维护路径的共享发现与计算重组。</a:t>
+            </a:r>
+            <a:r>
+              <a:rPr lang="zh-CN" altLang="en-US" sz="1200" dirty="0"/>
+              <a:t> 通过统一计算图保留同一结果的多种合法生产方式，使不同视图能够调整维护路径、形成共同中间结果。共享既可通过提取公共计算实现，也可通过复用已有结果实现，从而发现原始独立维护计划中未显现的共享机会。</a:t>
+            </a:r>
+          </a:p>
+          <a:p>
+            <a:r>
+              <a:rPr lang="zh-CN" altLang="en-US" sz="1200" b="1" dirty="0"/>
+              <a:t>支持共享机会相互竞争时的视图组协同优化。</a:t>
+            </a:r>
+            <a:r>
+              <a:rPr lang="zh-CN" altLang="en-US" sz="1200" dirty="0"/>
+              <a:t> 将各视图的路径选择联合考虑，评估采用某个共享节点对其他共享机会的影响，选择能够共同实现的共享组合，避免局部高共享节点挤占更有价值的组合。再依据实际消费者及增量维护成本决定物化，使逻辑上的共享机会转化为可执行、具有维护收益的复用方案。</a:t>
+            </a:r>
+          </a:p>
+          <a:p>
+            <a:r>
+              <a:rPr lang="zh-CN" altLang="en-US" sz="1200" b="1" dirty="0"/>
+              <a:t>创新点</a:t>
+            </a:r>
+            <a:endParaRPr lang="zh-CN" altLang="en-US" sz="1200" dirty="0"/>
+          </a:p>
+          <a:p>
+            <a:r>
+              <a:rPr lang="zh-CN" altLang="en-US" sz="1200" b="1" dirty="0"/>
+              <a:t>面向增量语义的统一候选图构建。</a:t>
+            </a:r>
+            <a:r>
+              <a:rPr lang="zh-CN" altLang="en-US" sz="1200" dirty="0"/>
+              <a:t> 将增量维护语义、数据包含关系与约束改写融入迭代建图，按需生成共享节点及替代路径，为跨视图协同优化提供统一表示。</a:t>
+            </a:r>
+          </a:p>
+          <a:p>
+            <a:r>
+              <a:rPr lang="zh-CN" altLang="en-US" sz="1200" b="1" dirty="0"/>
+              <a:t>感知路径竞争的动态共享子图选择。</a:t>
+            </a:r>
+            <a:r>
+              <a:rPr lang="zh-CN" altLang="en-US" sz="1200" dirty="0"/>
+              <a:t> 联合选择共享节点及其服务目标，随路径确定更新共享权重，通过局部分支试算比较实际共享程度，生成依赖完整、无环的执行子图。</a:t>
+            </a:r>
+          </a:p>
+          <a:p>
+            <a:r>
+              <a:rPr lang="zh-CN" altLang="en-US" sz="1200" b="1" dirty="0"/>
+              <a:t>逻辑共享与物化收益的分层决策。</a:t>
+            </a:r>
+            <a:r>
+              <a:rPr lang="zh-CN" altLang="en-US" sz="1200" dirty="0"/>
+              <a:t> 先确定相容的计算路径和实际消费者，再比较重复计算与共享维护的总代价，决定是否物化，避免将潜在共享机会直接等同于维护收益。</a:t>
+            </a:r>
+          </a:p>
+          <a:p>
+            <a:r>
+              <a:rPr lang="zh-CN" altLang="en-US" sz="1200" b="1" dirty="0"/>
+              <a:t>总结</a:t>
+            </a:r>
+            <a:endParaRPr lang="zh-CN" altLang="en-US" sz="1200" dirty="0"/>
+          </a:p>
+          <a:p>
+            <a:r>
+              <a:rPr lang="zh-CN" altLang="en-US" sz="1200" dirty="0"/>
+              <a:t>本方案以统一计算图贯通共享机会发现、执行路径选择与中间物化决策，将约束化简、增量改写和跨视图复用纳入同一优化流程。已有维护优化实现在业务数据集上取得 </a:t>
+            </a:r>
+            <a:r>
+              <a:rPr lang="en-US" altLang="zh-CN" sz="1200" b="1" dirty="0"/>
+              <a:t>3.14×</a:t>
+            </a:r>
+            <a:r>
+              <a:rPr lang="zh-CN" altLang="en-US" sz="1200" b="1" dirty="0"/>
+              <a:t>～</a:t>
+            </a:r>
+            <a:r>
+              <a:rPr lang="en-US" altLang="zh-CN" sz="1200" b="1" dirty="0"/>
+              <a:t>6.46×</a:t>
+            </a:r>
+            <a:r>
+              <a:rPr lang="zh-CN" altLang="en-US" sz="1200"/>
+              <a:t> 加速，为进一步开展视图组协同优化提供验证基础。</a:t>
+            </a:r>
+          </a:p>
+          <a:p>
+            <a:endParaRPr lang="zh-CN" altLang="en-US" sz="1200" dirty="0"/>
+          </a:p>
+        </p:txBody>
+      </p:sp>
+    </p:spTree>
+    <p:extLst>
+      <p:ext uri="{BB962C8B-B14F-4D97-AF65-F5344CB8AC3E}">
+        <p14:creationId xmlns:p14="http://schemas.microsoft.com/office/powerpoint/2010/main" val="283529375"/>
+      </p:ext>
+    </p:extLst>
+  </p:cSld>
+  <p:clrMapOvr>
+    <a:masterClrMapping/>
+  </p:clrMapOvr>
+</p:sld>
+</file>
+
+<file path=ppt/slides/slide5.xml><?xml version="1.0" encoding="utf-8"?>
 <p:sld xmlns:a="http://schemas.openxmlformats.org/drawingml/2006/main" xmlns:r="http://schemas.openxmlformats.org/officeDocument/2006/relationships" xmlns:p="http://schemas.openxmlformats.org/presentationml/2006/main">
   <p:cSld>
     <p:spTree>
@@ -15625,7 +17361,7 @@
 </p:sld>
 </file>
 
-<file path=ppt/slides/slide5.xml><?xml version="1.0" encoding="utf-8"?>
+<file path=ppt/slides/slide6.xml><?xml version="1.0" encoding="utf-8"?>
 <p:sld xmlns:a="http://schemas.openxmlformats.org/drawingml/2006/main" xmlns:r="http://schemas.openxmlformats.org/officeDocument/2006/relationships" xmlns:p="http://schemas.openxmlformats.org/presentationml/2006/main">
   <p:cSld>
     <p:spTree>
@@ -18581,7 +20317,7 @@
 </p:sld>
 </file>
 
-<file path=ppt/slides/slide6.xml><?xml version="1.0" encoding="utf-8"?>
+<file path=ppt/slides/slide7.xml><?xml version="1.0" encoding="utf-8"?>
 <p:sld xmlns:a="http://schemas.openxmlformats.org/drawingml/2006/main" xmlns:r="http://schemas.openxmlformats.org/officeDocument/2006/relationships" xmlns:p="http://schemas.openxmlformats.org/presentationml/2006/main">
   <p:cSld>
     <p:spTree>
@@ -23730,7 +25466,7 @@
 </p:sld>
 </file>
 
-<file path=ppt/slides/slide7.xml><?xml version="1.0" encoding="utf-8"?>
+<file path=ppt/slides/slide8.xml><?xml version="1.0" encoding="utf-8"?>
 <p:sld xmlns:a="http://schemas.openxmlformats.org/drawingml/2006/main" xmlns:r="http://schemas.openxmlformats.org/officeDocument/2006/relationships" xmlns:p="http://schemas.openxmlformats.org/presentationml/2006/main">
   <p:cSld>
     <p:spTree>
@@ -32936,7 +34672,7 @@
 </p:sld>
 </file>
 
-<file path=ppt/slides/slide8.xml><?xml version="1.0" encoding="utf-8"?>
+<file path=ppt/slides/slide9.xml><?xml version="1.0" encoding="utf-8"?>
 <p:sld xmlns:a="http://schemas.openxmlformats.org/drawingml/2006/main" xmlns:r="http://schemas.openxmlformats.org/officeDocument/2006/relationships" xmlns:p="http://schemas.openxmlformats.org/presentationml/2006/main">
   <p:cSld>
     <p:spTree>
@@ -34429,7 +36165,7 @@
         </p:nvSpPr>
         <p:spPr>
           <a:xfrm>
-            <a:off x="6096000" y="4853638"/>
+            <a:off x="4186123" y="4902209"/>
             <a:ext cx="1681886" cy="607162"/>
           </a:xfrm>
           <a:prstGeom prst="roundRect">
@@ -34701,8 +36437,8 @@
         </p:nvCxnSpPr>
         <p:spPr>
           <a:xfrm rot="10800000" flipV="1">
-            <a:off x="1353616" y="5157218"/>
-            <a:ext cx="4742384" cy="423973"/>
+            <a:off x="1353617" y="5205790"/>
+            <a:ext cx="2832507" cy="375402"/>
           </a:xfrm>
           <a:prstGeom prst="bentConnector2">
             <a:avLst/>
@@ -34824,14 +36560,14 @@
           <p:cNvCxnSpPr>
             <a:cxnSpLocks/>
             <a:stCxn id="81" idx="0"/>
-            <a:endCxn id="78" idx="3"/>
+            <a:endCxn id="2" idx="3"/>
           </p:cNvCxnSpPr>
           <p:nvPr/>
         </p:nvCxnSpPr>
         <p:spPr>
           <a:xfrm rot="16200000" flipV="1">
-            <a:off x="8640627" y="4294479"/>
-            <a:ext cx="822959" cy="2548439"/>
+            <a:off x="9014214" y="4668066"/>
+            <a:ext cx="774388" cy="1849835"/>
           </a:xfrm>
           <a:prstGeom prst="bentConnector2">
             <a:avLst/>
@@ -34993,14 +36729,14 @@
           <p:cNvCxnSpPr>
             <a:cxnSpLocks/>
             <a:stCxn id="74" idx="3"/>
-            <a:endCxn id="78" idx="2"/>
+            <a:endCxn id="2" idx="2"/>
           </p:cNvCxnSpPr>
           <p:nvPr/>
         </p:nvCxnSpPr>
         <p:spPr>
           <a:xfrm flipV="1">
-            <a:off x="4456785" y="5460800"/>
-            <a:ext cx="2480158" cy="423973"/>
+            <a:off x="4456785" y="5509371"/>
+            <a:ext cx="3178762" cy="375402"/>
           </a:xfrm>
           <a:prstGeom prst="bentConnector2">
             <a:avLst/>
@@ -35061,48 +36797,12 @@
           </a:p>
         </p:txBody>
       </p:sp>
-    </p:spTree>
-    <p:extLst>
-      <p:ext uri="{BB962C8B-B14F-4D97-AF65-F5344CB8AC3E}">
-        <p14:creationId xmlns:p14="http://schemas.microsoft.com/office/powerpoint/2010/main" val="3681331919"/>
-      </p:ext>
-    </p:extLst>
-  </p:cSld>
-  <p:clrMapOvr>
-    <a:masterClrMapping/>
-  </p:clrMapOvr>
-</p:sld>
-</file>
-
-<file path=ppt/slides/slide9.xml><?xml version="1.0" encoding="utf-8"?>
-<p:sld xmlns:a="http://schemas.openxmlformats.org/drawingml/2006/main" xmlns:r="http://schemas.openxmlformats.org/officeDocument/2006/relationships" xmlns:p="http://schemas.openxmlformats.org/presentationml/2006/main">
-  <p:cSld>
-    <p:spTree>
-      <p:nvGrpSpPr>
-        <p:cNvPr id="1" name="">
-          <a:extLst>
-            <a:ext uri="{FF2B5EF4-FFF2-40B4-BE49-F238E27FC236}">
-              <a16:creationId xmlns:a16="http://schemas.microsoft.com/office/drawing/2014/main" id="{D6FA83D2-6580-58C7-9C2A-B594C410D8CB}"/>
-            </a:ext>
-          </a:extLst>
-        </p:cNvPr>
-        <p:cNvGrpSpPr/>
-        <p:nvPr/>
-      </p:nvGrpSpPr>
-      <p:grpSpPr>
-        <a:xfrm>
-          <a:off x="0" y="0"/>
-          <a:ext cx="0" cy="0"/>
-          <a:chOff x="0" y="0"/>
-          <a:chExt cx="0" cy="0"/>
-        </a:xfrm>
-      </p:grpSpPr>
       <p:sp>
         <p:nvSpPr>
           <p:cNvPr id="2" name="矩形: 圆角 1">
             <a:extLst>
               <a:ext uri="{FF2B5EF4-FFF2-40B4-BE49-F238E27FC236}">
-                <a16:creationId xmlns:a16="http://schemas.microsoft.com/office/drawing/2014/main" id="{E4656264-8E3E-0CA5-ED3D-AF12F5E59978}"/>
+                <a16:creationId xmlns:a16="http://schemas.microsoft.com/office/drawing/2014/main" id="{A97B5BE3-A03C-B40F-D46C-F2E69C220AA7}"/>
               </a:ext>
             </a:extLst>
           </p:cNvPr>
@@ -35111,8 +36811,8 @@
         </p:nvSpPr>
         <p:spPr>
           <a:xfrm>
-            <a:off x="2702355" y="-213759"/>
-            <a:ext cx="1432560" cy="607162"/>
+            <a:off x="6794604" y="4902209"/>
+            <a:ext cx="1681886" cy="607162"/>
           </a:xfrm>
           <a:prstGeom prst="roundRect">
             <a:avLst/>
@@ -35151,1136 +36851,47 @@
                   <a:schemeClr val="tx1"/>
                 </a:solidFill>
               </a:rPr>
-              <a:t>选择</a:t>
-            </a:r>
-            <a:r>
-              <a:rPr lang="en-US" altLang="zh-CN" dirty="0">
-                <a:solidFill>
-                  <a:schemeClr val="tx1"/>
-                </a:solidFill>
-              </a:rPr>
-              <a:t>F</a:t>
-            </a:r>
+              <a:t>更新当前</a:t>
+            </a:r>
+            <a:endParaRPr lang="en-US" altLang="zh-CN" dirty="0">
+              <a:solidFill>
+                <a:schemeClr val="tx1"/>
+              </a:solidFill>
+            </a:endParaRPr>
+          </a:p>
+          <a:p>
+            <a:pPr algn="ctr"/>
             <a:r>
               <a:rPr lang="zh-CN" altLang="en-US" dirty="0">
                 <a:solidFill>
                   <a:schemeClr val="tx1"/>
                 </a:solidFill>
               </a:rPr>
-              <a:t>、</a:t>
-            </a:r>
-            <a:r>
-              <a:rPr lang="en-US" altLang="zh-CN" dirty="0">
-                <a:solidFill>
-                  <a:schemeClr val="tx1"/>
-                </a:solidFill>
-              </a:rPr>
-              <a:t>J23</a:t>
-            </a:r>
-          </a:p>
-          <a:p>
-            <a:pPr algn="ctr"/>
-            <a:r>
-              <a:rPr lang="zh-CN" altLang="en-US" dirty="0">
-                <a:solidFill>
-                  <a:schemeClr val="tx1"/>
-                </a:solidFill>
-              </a:rPr>
-              <a:t>评分</a:t>
-            </a:r>
-            <a:r>
-              <a:rPr lang="en-US" altLang="zh-CN" dirty="0">
-                <a:solidFill>
-                  <a:schemeClr val="tx1"/>
-                </a:solidFill>
-              </a:rPr>
-              <a:t>+4</a:t>
-            </a:r>
-            <a:endParaRPr lang="zh-CN" altLang="en-US" dirty="0">
-              <a:solidFill>
-                <a:schemeClr val="tx1"/>
-              </a:solidFill>
-            </a:endParaRPr>
-          </a:p>
-        </p:txBody>
-      </p:sp>
-      <p:sp>
-        <p:nvSpPr>
-          <p:cNvPr id="3" name="矩形: 圆角 2">
-            <a:extLst>
-              <a:ext uri="{FF2B5EF4-FFF2-40B4-BE49-F238E27FC236}">
-                <a16:creationId xmlns:a16="http://schemas.microsoft.com/office/drawing/2014/main" id="{CE8BA7F3-BE0C-02E9-7C60-9E47E2ACBE9A}"/>
-              </a:ext>
-            </a:extLst>
-          </p:cNvPr>
-          <p:cNvSpPr/>
-          <p:nvPr/>
-        </p:nvSpPr>
-        <p:spPr>
-          <a:xfrm>
-            <a:off x="2352595" y="773994"/>
-            <a:ext cx="2132079" cy="607162"/>
-          </a:xfrm>
-          <a:prstGeom prst="roundRect">
-            <a:avLst/>
-          </a:prstGeom>
-          <a:solidFill>
-            <a:schemeClr val="accent1">
-              <a:lumMod val="20000"/>
-              <a:lumOff val="80000"/>
-            </a:schemeClr>
-          </a:solidFill>
-          <a:ln>
-            <a:prstDash val="dash"/>
-          </a:ln>
-        </p:spPr>
-        <p:style>
-          <a:lnRef idx="2">
-            <a:schemeClr val="accent1">
-              <a:shade val="15000"/>
-            </a:schemeClr>
-          </a:lnRef>
-          <a:fillRef idx="1">
-            <a:schemeClr val="accent1"/>
-          </a:fillRef>
-          <a:effectRef idx="0">
-            <a:schemeClr val="accent1"/>
-          </a:effectRef>
-          <a:fontRef idx="minor">
-            <a:schemeClr val="lt1"/>
-          </a:fontRef>
-        </p:style>
-        <p:txBody>
-          <a:bodyPr rtlCol="0" anchor="ctr"/>
-          <a:lstStyle/>
-          <a:p>
-            <a:pPr algn="ctr"/>
-            <a:r>
-              <a:rPr lang="zh-CN" altLang="en-US" dirty="0">
-                <a:solidFill>
-                  <a:schemeClr val="tx1"/>
-                </a:solidFill>
-              </a:rPr>
-              <a:t>剩余候选</a:t>
-            </a:r>
-            <a:endParaRPr lang="en-US" altLang="zh-CN" dirty="0">
-              <a:solidFill>
-                <a:schemeClr val="tx1"/>
-              </a:solidFill>
-            </a:endParaRPr>
-          </a:p>
-          <a:p>
-            <a:pPr algn="ctr"/>
-            <a:r>
-              <a:rPr lang="en-US" altLang="zh-CN" dirty="0">
-                <a:solidFill>
-                  <a:schemeClr val="tx1"/>
-                </a:solidFill>
-              </a:rPr>
-              <a:t>J23:2;  Sf:2;  mv3:2</a:t>
-            </a:r>
-            <a:endParaRPr lang="zh-CN" altLang="en-US" dirty="0">
-              <a:solidFill>
-                <a:schemeClr val="tx1"/>
-              </a:solidFill>
-            </a:endParaRPr>
-          </a:p>
-        </p:txBody>
-      </p:sp>
-      <p:sp>
-        <p:nvSpPr>
-          <p:cNvPr id="8" name="矩形: 圆角 7">
-            <a:extLst>
-              <a:ext uri="{FF2B5EF4-FFF2-40B4-BE49-F238E27FC236}">
-                <a16:creationId xmlns:a16="http://schemas.microsoft.com/office/drawing/2014/main" id="{F1945B58-8936-7B8F-0192-5FB7BBE00157}"/>
-              </a:ext>
-            </a:extLst>
-          </p:cNvPr>
-          <p:cNvSpPr/>
-          <p:nvPr/>
-        </p:nvSpPr>
-        <p:spPr>
-          <a:xfrm>
-            <a:off x="1565601" y="1871079"/>
-            <a:ext cx="1573988" cy="607162"/>
-          </a:xfrm>
-          <a:prstGeom prst="roundRect">
-            <a:avLst/>
-          </a:prstGeom>
-          <a:solidFill>
-            <a:schemeClr val="accent1">
-              <a:lumMod val="20000"/>
-              <a:lumOff val="80000"/>
-            </a:schemeClr>
-          </a:solidFill>
-        </p:spPr>
-        <p:style>
-          <a:lnRef idx="2">
-            <a:schemeClr val="accent1">
-              <a:shade val="15000"/>
-            </a:schemeClr>
-          </a:lnRef>
-          <a:fillRef idx="1">
-            <a:schemeClr val="accent1"/>
-          </a:fillRef>
-          <a:effectRef idx="0">
-            <a:schemeClr val="accent1"/>
-          </a:effectRef>
-          <a:fontRef idx="minor">
-            <a:schemeClr val="lt1"/>
-          </a:fontRef>
-        </p:style>
-        <p:txBody>
-          <a:bodyPr rtlCol="0" anchor="ctr"/>
-          <a:lstStyle/>
-          <a:p>
-            <a:pPr algn="ctr"/>
-            <a:r>
-              <a:rPr lang="zh-CN" altLang="en-US" dirty="0">
-                <a:solidFill>
-                  <a:schemeClr val="tx1"/>
-                </a:solidFill>
-              </a:rPr>
-              <a:t>先选</a:t>
-            </a:r>
-            <a:r>
-              <a:rPr lang="en-US" altLang="zh-CN" dirty="0">
-                <a:solidFill>
-                  <a:schemeClr val="tx1"/>
-                </a:solidFill>
-              </a:rPr>
-              <a:t>J23</a:t>
-            </a:r>
-          </a:p>
-          <a:p>
-            <a:pPr algn="ctr"/>
-            <a:r>
-              <a:rPr lang="zh-CN" altLang="en-US" dirty="0">
-                <a:solidFill>
-                  <a:schemeClr val="tx1"/>
-                </a:solidFill>
-              </a:rPr>
-              <a:t>服务</a:t>
-            </a:r>
-            <a:r>
-              <a:rPr lang="en-US" altLang="zh-CN" dirty="0">
-                <a:solidFill>
-                  <a:schemeClr val="tx1"/>
-                </a:solidFill>
-              </a:rPr>
-              <a:t>mv1,mv4</a:t>
-            </a:r>
-          </a:p>
-        </p:txBody>
-      </p:sp>
-      <p:sp>
-        <p:nvSpPr>
-          <p:cNvPr id="10" name="矩形: 圆角 9">
-            <a:extLst>
-              <a:ext uri="{FF2B5EF4-FFF2-40B4-BE49-F238E27FC236}">
-                <a16:creationId xmlns:a16="http://schemas.microsoft.com/office/drawing/2014/main" id="{DAF26086-9A0F-EFB6-171A-BA4C3E986279}"/>
-              </a:ext>
-            </a:extLst>
-          </p:cNvPr>
-          <p:cNvSpPr/>
-          <p:nvPr/>
-        </p:nvSpPr>
-        <p:spPr>
-          <a:xfrm>
-            <a:off x="3697680" y="1871079"/>
-            <a:ext cx="1573988" cy="607162"/>
-          </a:xfrm>
-          <a:prstGeom prst="roundRect">
-            <a:avLst/>
-          </a:prstGeom>
-          <a:solidFill>
-            <a:schemeClr val="accent1">
-              <a:lumMod val="20000"/>
-              <a:lumOff val="80000"/>
-            </a:schemeClr>
-          </a:solidFill>
-        </p:spPr>
-        <p:style>
-          <a:lnRef idx="2">
-            <a:schemeClr val="accent1">
-              <a:shade val="15000"/>
-            </a:schemeClr>
-          </a:lnRef>
-          <a:fillRef idx="1">
-            <a:schemeClr val="accent1"/>
-          </a:fillRef>
-          <a:effectRef idx="0">
-            <a:schemeClr val="accent1"/>
-          </a:effectRef>
-          <a:fontRef idx="minor">
-            <a:schemeClr val="lt1"/>
-          </a:fontRef>
-        </p:style>
-        <p:txBody>
-          <a:bodyPr rtlCol="0" anchor="ctr"/>
-          <a:lstStyle/>
-          <a:p>
-            <a:pPr algn="ctr"/>
-            <a:r>
-              <a:rPr lang="zh-CN" altLang="en-US" dirty="0">
-                <a:solidFill>
-                  <a:schemeClr val="tx1"/>
-                </a:solidFill>
-              </a:rPr>
-              <a:t>先选</a:t>
-            </a:r>
-            <a:r>
-              <a:rPr lang="en-US" altLang="zh-CN" dirty="0">
-                <a:solidFill>
-                  <a:schemeClr val="tx1"/>
-                </a:solidFill>
-              </a:rPr>
-              <a:t>Sf</a:t>
-            </a:r>
-          </a:p>
-          <a:p>
-            <a:pPr algn="ctr"/>
-            <a:r>
-              <a:rPr lang="zh-CN" altLang="en-US" dirty="0">
-                <a:solidFill>
-                  <a:schemeClr val="tx1"/>
-                </a:solidFill>
-              </a:rPr>
-              <a:t>服务</a:t>
-            </a:r>
-            <a:r>
-              <a:rPr lang="en-US" altLang="zh-CN" dirty="0">
-                <a:solidFill>
-                  <a:schemeClr val="tx1"/>
-                </a:solidFill>
-              </a:rPr>
-              <a:t>mv1,mv2</a:t>
-            </a:r>
-          </a:p>
-        </p:txBody>
-      </p:sp>
-      <p:sp>
-        <p:nvSpPr>
-          <p:cNvPr id="12" name="矩形: 圆角 11">
-            <a:extLst>
-              <a:ext uri="{FF2B5EF4-FFF2-40B4-BE49-F238E27FC236}">
-                <a16:creationId xmlns:a16="http://schemas.microsoft.com/office/drawing/2014/main" id="{8C5E3500-8CC2-EC9A-123B-E448AD098751}"/>
-              </a:ext>
-            </a:extLst>
-          </p:cNvPr>
-          <p:cNvSpPr/>
-          <p:nvPr/>
-        </p:nvSpPr>
-        <p:spPr>
-          <a:xfrm>
-            <a:off x="1214323" y="2833377"/>
-            <a:ext cx="2033936" cy="607162"/>
-          </a:xfrm>
-          <a:prstGeom prst="roundRect">
-            <a:avLst/>
-          </a:prstGeom>
-          <a:solidFill>
-            <a:schemeClr val="accent1">
-              <a:lumMod val="20000"/>
-              <a:lumOff val="80000"/>
-            </a:schemeClr>
-          </a:solidFill>
-          <a:ln>
-            <a:prstDash val="dash"/>
-          </a:ln>
-        </p:spPr>
-        <p:style>
-          <a:lnRef idx="2">
-            <a:schemeClr val="accent1">
-              <a:shade val="15000"/>
-            </a:schemeClr>
-          </a:lnRef>
-          <a:fillRef idx="1">
-            <a:schemeClr val="accent1"/>
-          </a:fillRef>
-          <a:effectRef idx="0">
-            <a:schemeClr val="accent1"/>
-          </a:effectRef>
-          <a:fontRef idx="minor">
-            <a:schemeClr val="lt1"/>
-          </a:fontRef>
-        </p:style>
-        <p:txBody>
-          <a:bodyPr rtlCol="0" anchor="ctr"/>
-          <a:lstStyle/>
-          <a:p>
-            <a:pPr algn="ctr"/>
-            <a:r>
-              <a:rPr lang="en-US" altLang="zh-CN" dirty="0">
-                <a:solidFill>
-                  <a:schemeClr val="tx1"/>
-                </a:solidFill>
-              </a:rPr>
-              <a:t>Sf</a:t>
-            </a:r>
-            <a:r>
-              <a:rPr lang="zh-CN" altLang="en-US" dirty="0">
-                <a:solidFill>
-                  <a:schemeClr val="tx1"/>
-                </a:solidFill>
-              </a:rPr>
-              <a:t>失去</a:t>
-            </a:r>
-            <a:r>
-              <a:rPr lang="en-US" altLang="zh-CN" dirty="0">
-                <a:solidFill>
-                  <a:schemeClr val="tx1"/>
-                </a:solidFill>
-              </a:rPr>
-              <a:t>mv1:2-&gt;1  </a:t>
-            </a:r>
-          </a:p>
-          <a:p>
-            <a:pPr algn="ctr"/>
-            <a:r>
-              <a:rPr lang="en-US" altLang="zh-CN" dirty="0">
-                <a:solidFill>
-                  <a:schemeClr val="tx1"/>
-                </a:solidFill>
-              </a:rPr>
-              <a:t>mv3</a:t>
-            </a:r>
-            <a:r>
-              <a:rPr lang="zh-CN" altLang="en-US" dirty="0">
-                <a:solidFill>
-                  <a:schemeClr val="tx1"/>
-                </a:solidFill>
-              </a:rPr>
-              <a:t>失去</a:t>
-            </a:r>
-            <a:r>
-              <a:rPr lang="en-US" altLang="zh-CN" dirty="0">
-                <a:solidFill>
-                  <a:schemeClr val="tx1"/>
-                </a:solidFill>
-              </a:rPr>
-              <a:t>mv4:2-&gt;1</a:t>
-            </a:r>
-            <a:endParaRPr lang="zh-CN" altLang="en-US" dirty="0">
-              <a:solidFill>
-                <a:schemeClr val="tx1"/>
-              </a:solidFill>
-            </a:endParaRPr>
-          </a:p>
-        </p:txBody>
-      </p:sp>
-      <p:sp>
-        <p:nvSpPr>
-          <p:cNvPr id="13" name="矩形: 圆角 12">
-            <a:extLst>
-              <a:ext uri="{FF2B5EF4-FFF2-40B4-BE49-F238E27FC236}">
-                <a16:creationId xmlns:a16="http://schemas.microsoft.com/office/drawing/2014/main" id="{8888C20E-A637-72A6-982A-29DFACA68303}"/>
-              </a:ext>
-            </a:extLst>
-          </p:cNvPr>
-          <p:cNvSpPr/>
-          <p:nvPr/>
-        </p:nvSpPr>
-        <p:spPr>
-          <a:xfrm>
-            <a:off x="3551837" y="2833377"/>
-            <a:ext cx="2033936" cy="355135"/>
-          </a:xfrm>
-          <a:prstGeom prst="roundRect">
-            <a:avLst/>
-          </a:prstGeom>
-          <a:solidFill>
-            <a:schemeClr val="accent1">
-              <a:lumMod val="20000"/>
-              <a:lumOff val="80000"/>
-            </a:schemeClr>
-          </a:solidFill>
-          <a:ln>
-            <a:prstDash val="dash"/>
-          </a:ln>
-        </p:spPr>
-        <p:style>
-          <a:lnRef idx="2">
-            <a:schemeClr val="accent1">
-              <a:shade val="15000"/>
-            </a:schemeClr>
-          </a:lnRef>
-          <a:fillRef idx="1">
-            <a:schemeClr val="accent1"/>
-          </a:fillRef>
-          <a:effectRef idx="0">
-            <a:schemeClr val="accent1"/>
-          </a:effectRef>
-          <a:fontRef idx="minor">
-            <a:schemeClr val="lt1"/>
-          </a:fontRef>
-        </p:style>
-        <p:txBody>
-          <a:bodyPr rtlCol="0" anchor="ctr"/>
-          <a:lstStyle/>
-          <a:p>
-            <a:pPr algn="ctr"/>
-            <a:r>
-              <a:rPr lang="en-US" altLang="zh-CN" dirty="0">
-                <a:solidFill>
-                  <a:schemeClr val="tx1"/>
-                </a:solidFill>
-              </a:rPr>
-              <a:t>J123</a:t>
-            </a:r>
-            <a:r>
-              <a:rPr lang="zh-CN" altLang="en-US" dirty="0">
-                <a:solidFill>
-                  <a:schemeClr val="tx1"/>
-                </a:solidFill>
-              </a:rPr>
-              <a:t>失去</a:t>
-            </a:r>
-            <a:r>
-              <a:rPr lang="en-US" altLang="zh-CN" dirty="0">
-                <a:solidFill>
-                  <a:schemeClr val="tx1"/>
-                </a:solidFill>
-              </a:rPr>
-              <a:t>mv1:2-&gt;1  </a:t>
-            </a:r>
-          </a:p>
-        </p:txBody>
-      </p:sp>
-      <p:sp>
-        <p:nvSpPr>
-          <p:cNvPr id="15" name="矩形: 圆角 14">
-            <a:extLst>
-              <a:ext uri="{FF2B5EF4-FFF2-40B4-BE49-F238E27FC236}">
-                <a16:creationId xmlns:a16="http://schemas.microsoft.com/office/drawing/2014/main" id="{3EB741B9-BD0B-C2BD-832E-3A5A73496544}"/>
-              </a:ext>
-            </a:extLst>
-          </p:cNvPr>
-          <p:cNvSpPr/>
-          <p:nvPr/>
-        </p:nvSpPr>
-        <p:spPr>
-          <a:xfrm>
-            <a:off x="1274448" y="4375905"/>
-            <a:ext cx="1913685" cy="607162"/>
-          </a:xfrm>
-          <a:prstGeom prst="roundRect">
-            <a:avLst/>
-          </a:prstGeom>
-          <a:solidFill>
-            <a:schemeClr val="accent1">
-              <a:lumMod val="20000"/>
-              <a:lumOff val="80000"/>
-            </a:schemeClr>
-          </a:solidFill>
-          <a:ln>
-            <a:prstDash val="solid"/>
-          </a:ln>
-        </p:spPr>
-        <p:style>
-          <a:lnRef idx="2">
-            <a:schemeClr val="accent1">
-              <a:shade val="15000"/>
-            </a:schemeClr>
-          </a:lnRef>
-          <a:fillRef idx="1">
-            <a:schemeClr val="accent1"/>
-          </a:fillRef>
-          <a:effectRef idx="0">
-            <a:schemeClr val="accent1"/>
-          </a:effectRef>
-          <a:fontRef idx="minor">
-            <a:schemeClr val="lt1"/>
-          </a:fontRef>
-        </p:style>
-        <p:txBody>
-          <a:bodyPr rtlCol="0" anchor="ctr"/>
-          <a:lstStyle/>
-          <a:p>
-            <a:pPr algn="ctr"/>
-            <a:r>
-              <a:rPr lang="zh-CN" altLang="en-US" dirty="0">
-                <a:solidFill>
-                  <a:schemeClr val="tx1"/>
-                </a:solidFill>
-              </a:rPr>
-              <a:t>无额外共享候选</a:t>
-            </a:r>
-            <a:endParaRPr lang="en-US" altLang="zh-CN" dirty="0">
-              <a:solidFill>
-                <a:schemeClr val="tx1"/>
-              </a:solidFill>
-            </a:endParaRPr>
-          </a:p>
-          <a:p>
-            <a:pPr algn="ctr"/>
-            <a:r>
-              <a:rPr lang="zh-CN" altLang="en-US" dirty="0">
-                <a:solidFill>
-                  <a:schemeClr val="tx1"/>
-                </a:solidFill>
-              </a:rPr>
-              <a:t>补全计算路径</a:t>
-            </a:r>
-          </a:p>
-        </p:txBody>
-      </p:sp>
-      <p:sp>
-        <p:nvSpPr>
-          <p:cNvPr id="16" name="矩形: 圆角 15">
-            <a:extLst>
-              <a:ext uri="{FF2B5EF4-FFF2-40B4-BE49-F238E27FC236}">
-                <a16:creationId xmlns:a16="http://schemas.microsoft.com/office/drawing/2014/main" id="{0B887E0B-E2EA-FBAA-6B5D-69799D548CFC}"/>
-              </a:ext>
-            </a:extLst>
-          </p:cNvPr>
-          <p:cNvSpPr/>
-          <p:nvPr/>
-        </p:nvSpPr>
-        <p:spPr>
-          <a:xfrm>
-            <a:off x="3781811" y="3454294"/>
-            <a:ext cx="1573988" cy="607162"/>
-          </a:xfrm>
-          <a:prstGeom prst="roundRect">
-            <a:avLst/>
-          </a:prstGeom>
-          <a:solidFill>
-            <a:schemeClr val="accent1">
-              <a:lumMod val="20000"/>
-              <a:lumOff val="80000"/>
-            </a:schemeClr>
-          </a:solidFill>
-        </p:spPr>
-        <p:style>
-          <a:lnRef idx="2">
-            <a:schemeClr val="accent1">
-              <a:shade val="15000"/>
-            </a:schemeClr>
-          </a:lnRef>
-          <a:fillRef idx="1">
-            <a:schemeClr val="accent1"/>
-          </a:fillRef>
-          <a:effectRef idx="0">
-            <a:schemeClr val="accent1"/>
-          </a:effectRef>
-          <a:fontRef idx="minor">
-            <a:schemeClr val="lt1"/>
-          </a:fontRef>
-        </p:style>
-        <p:txBody>
-          <a:bodyPr rtlCol="0" anchor="ctr"/>
-          <a:lstStyle/>
-          <a:p>
-            <a:pPr algn="ctr"/>
-            <a:r>
-              <a:rPr lang="zh-CN" altLang="en-US" dirty="0">
-                <a:solidFill>
-                  <a:schemeClr val="tx1"/>
-                </a:solidFill>
-              </a:rPr>
-              <a:t>选择</a:t>
-            </a:r>
-            <a:r>
-              <a:rPr lang="en-US" altLang="zh-CN" dirty="0">
-                <a:solidFill>
-                  <a:schemeClr val="tx1"/>
-                </a:solidFill>
-              </a:rPr>
-              <a:t>mv3</a:t>
-            </a:r>
-          </a:p>
-          <a:p>
-            <a:pPr algn="ctr"/>
-            <a:r>
-              <a:rPr lang="zh-CN" altLang="en-US" dirty="0">
-                <a:solidFill>
-                  <a:schemeClr val="tx1"/>
-                </a:solidFill>
-              </a:rPr>
-              <a:t>服务</a:t>
-            </a:r>
-            <a:r>
-              <a:rPr lang="en-US" altLang="zh-CN" dirty="0">
-                <a:solidFill>
-                  <a:schemeClr val="tx1"/>
-                </a:solidFill>
-              </a:rPr>
-              <a:t>mv3,mv4</a:t>
-            </a:r>
-          </a:p>
-        </p:txBody>
-      </p:sp>
-      <p:sp>
-        <p:nvSpPr>
-          <p:cNvPr id="17" name="矩形: 圆角 16">
-            <a:extLst>
-              <a:ext uri="{FF2B5EF4-FFF2-40B4-BE49-F238E27FC236}">
-                <a16:creationId xmlns:a16="http://schemas.microsoft.com/office/drawing/2014/main" id="{8BF1329F-539C-8D6B-A8C2-0F387E7E4928}"/>
-              </a:ext>
-            </a:extLst>
-          </p:cNvPr>
-          <p:cNvSpPr/>
-          <p:nvPr/>
-        </p:nvSpPr>
-        <p:spPr>
-          <a:xfrm>
-            <a:off x="1414883" y="5279377"/>
-            <a:ext cx="1632814" cy="405170"/>
-          </a:xfrm>
-          <a:prstGeom prst="roundRect">
-            <a:avLst/>
-          </a:prstGeom>
-          <a:solidFill>
-            <a:schemeClr val="accent1">
-              <a:lumMod val="20000"/>
-              <a:lumOff val="80000"/>
-            </a:schemeClr>
-          </a:solidFill>
-          <a:ln>
-            <a:prstDash val="solid"/>
-          </a:ln>
-        </p:spPr>
-        <p:style>
-          <a:lnRef idx="2">
-            <a:schemeClr val="accent1">
-              <a:shade val="15000"/>
-            </a:schemeClr>
-          </a:lnRef>
-          <a:fillRef idx="1">
-            <a:schemeClr val="accent1"/>
-          </a:fillRef>
-          <a:effectRef idx="0">
-            <a:schemeClr val="accent1"/>
-          </a:effectRef>
-          <a:fontRef idx="minor">
-            <a:schemeClr val="lt1"/>
-          </a:fontRef>
-        </p:style>
-        <p:txBody>
-          <a:bodyPr rtlCol="0" anchor="ctr"/>
-          <a:lstStyle/>
-          <a:p>
-            <a:pPr algn="ctr"/>
-            <a:r>
-              <a:rPr lang="zh-CN" altLang="en-US" dirty="0">
-                <a:solidFill>
-                  <a:schemeClr val="tx1"/>
-                </a:solidFill>
-              </a:rPr>
-              <a:t>得分</a:t>
-            </a:r>
-            <a:r>
-              <a:rPr lang="en-US" altLang="zh-CN" dirty="0">
-                <a:solidFill>
-                  <a:schemeClr val="tx1"/>
-                </a:solidFill>
-              </a:rPr>
-              <a:t>:4+1=5</a:t>
-            </a:r>
-            <a:endParaRPr lang="zh-CN" altLang="en-US" dirty="0">
-              <a:solidFill>
-                <a:schemeClr val="tx1"/>
-              </a:solidFill>
-            </a:endParaRPr>
-          </a:p>
-        </p:txBody>
-      </p:sp>
-      <p:sp>
-        <p:nvSpPr>
-          <p:cNvPr id="18" name="矩形: 圆角 17">
-            <a:extLst>
-              <a:ext uri="{FF2B5EF4-FFF2-40B4-BE49-F238E27FC236}">
-                <a16:creationId xmlns:a16="http://schemas.microsoft.com/office/drawing/2014/main" id="{68BF753C-D4BC-CE63-3F4C-BDCBD15DFEEB}"/>
-              </a:ext>
-            </a:extLst>
-          </p:cNvPr>
-          <p:cNvSpPr/>
-          <p:nvPr/>
-        </p:nvSpPr>
-        <p:spPr>
-          <a:xfrm>
-            <a:off x="3752397" y="5276845"/>
-            <a:ext cx="1632814" cy="405170"/>
-          </a:xfrm>
-          <a:prstGeom prst="roundRect">
-            <a:avLst/>
-          </a:prstGeom>
-          <a:solidFill>
-            <a:schemeClr val="accent1">
-              <a:lumMod val="20000"/>
-              <a:lumOff val="80000"/>
-            </a:schemeClr>
-          </a:solidFill>
-          <a:ln>
-            <a:prstDash val="solid"/>
-          </a:ln>
-        </p:spPr>
-        <p:style>
-          <a:lnRef idx="2">
-            <a:schemeClr val="accent1">
-              <a:shade val="15000"/>
-            </a:schemeClr>
-          </a:lnRef>
-          <a:fillRef idx="1">
-            <a:schemeClr val="accent1"/>
-          </a:fillRef>
-          <a:effectRef idx="0">
-            <a:schemeClr val="accent1"/>
-          </a:effectRef>
-          <a:fontRef idx="minor">
-            <a:schemeClr val="lt1"/>
-          </a:fontRef>
-        </p:style>
-        <p:txBody>
-          <a:bodyPr rtlCol="0" anchor="ctr"/>
-          <a:lstStyle/>
-          <a:p>
-            <a:pPr algn="ctr"/>
-            <a:r>
-              <a:rPr lang="zh-CN" altLang="en-US" dirty="0">
-                <a:solidFill>
-                  <a:schemeClr val="tx1"/>
-                </a:solidFill>
-              </a:rPr>
-              <a:t>得分</a:t>
-            </a:r>
-            <a:r>
-              <a:rPr lang="en-US" altLang="zh-CN" dirty="0">
-                <a:solidFill>
-                  <a:schemeClr val="tx1"/>
-                </a:solidFill>
-              </a:rPr>
-              <a:t>:4+1+1=6</a:t>
-            </a:r>
-            <a:endParaRPr lang="zh-CN" altLang="en-US" dirty="0">
-              <a:solidFill>
-                <a:schemeClr val="tx1"/>
-              </a:solidFill>
-            </a:endParaRPr>
+              <a:t>计算子图</a:t>
+            </a:r>
           </a:p>
         </p:txBody>
       </p:sp>
       <p:cxnSp>
         <p:nvCxnSpPr>
-          <p:cNvPr id="21" name="直接箭头连接符 20">
+          <p:cNvPr id="25" name="直接箭头连接符 24">
             <a:extLst>
               <a:ext uri="{FF2B5EF4-FFF2-40B4-BE49-F238E27FC236}">
-                <a16:creationId xmlns:a16="http://schemas.microsoft.com/office/drawing/2014/main" id="{DF290B32-48D6-92F9-90D8-350D96E40E66}"/>
+                <a16:creationId xmlns:a16="http://schemas.microsoft.com/office/drawing/2014/main" id="{B6EBA066-AC26-F200-C2E6-41C63B378061}"/>
               </a:ext>
             </a:extLst>
           </p:cNvPr>
           <p:cNvCxnSpPr>
             <a:cxnSpLocks/>
-            <a:stCxn id="2" idx="2"/>
-            <a:endCxn id="3" idx="0"/>
-          </p:cNvCxnSpPr>
-          <p:nvPr/>
-        </p:nvCxnSpPr>
-        <p:spPr>
-          <a:xfrm>
-            <a:off x="3418635" y="393403"/>
-            <a:ext cx="0" cy="380591"/>
-          </a:xfrm>
-          <a:prstGeom prst="straightConnector1">
-            <a:avLst/>
-          </a:prstGeom>
-          <a:ln>
-            <a:prstDash val="dash"/>
-            <a:tailEnd type="triangle"/>
-          </a:ln>
-        </p:spPr>
-        <p:style>
-          <a:lnRef idx="1">
-            <a:schemeClr val="accent1"/>
-          </a:lnRef>
-          <a:fillRef idx="0">
-            <a:schemeClr val="accent1"/>
-          </a:fillRef>
-          <a:effectRef idx="0">
-            <a:schemeClr val="accent1"/>
-          </a:effectRef>
-          <a:fontRef idx="minor">
-            <a:schemeClr val="tx1"/>
-          </a:fontRef>
-        </p:style>
-      </p:cxnSp>
-      <p:cxnSp>
-        <p:nvCxnSpPr>
-          <p:cNvPr id="24" name="直接箭头连接符 23">
-            <a:extLst>
-              <a:ext uri="{FF2B5EF4-FFF2-40B4-BE49-F238E27FC236}">
-                <a16:creationId xmlns:a16="http://schemas.microsoft.com/office/drawing/2014/main" id="{7939BFBA-4590-AAD4-2737-773BFDFABA9F}"/>
-              </a:ext>
-            </a:extLst>
-          </p:cNvPr>
-          <p:cNvCxnSpPr>
-            <a:cxnSpLocks/>
-            <a:stCxn id="10" idx="2"/>
-            <a:endCxn id="13" idx="0"/>
-          </p:cNvCxnSpPr>
-          <p:nvPr/>
-        </p:nvCxnSpPr>
-        <p:spPr>
-          <a:xfrm>
-            <a:off x="4484674" y="2478241"/>
-            <a:ext cx="84131" cy="355136"/>
-          </a:xfrm>
-          <a:prstGeom prst="straightConnector1">
-            <a:avLst/>
-          </a:prstGeom>
-          <a:ln>
-            <a:prstDash val="dash"/>
-            <a:tailEnd type="triangle"/>
-          </a:ln>
-        </p:spPr>
-        <p:style>
-          <a:lnRef idx="1">
-            <a:schemeClr val="accent1"/>
-          </a:lnRef>
-          <a:fillRef idx="0">
-            <a:schemeClr val="accent1"/>
-          </a:fillRef>
-          <a:effectRef idx="0">
-            <a:schemeClr val="accent1"/>
-          </a:effectRef>
-          <a:fontRef idx="minor">
-            <a:schemeClr val="tx1"/>
-          </a:fontRef>
-        </p:style>
-      </p:cxnSp>
-      <p:cxnSp>
-        <p:nvCxnSpPr>
-          <p:cNvPr id="26" name="连接符: 肘形 25">
-            <a:extLst>
-              <a:ext uri="{FF2B5EF4-FFF2-40B4-BE49-F238E27FC236}">
-                <a16:creationId xmlns:a16="http://schemas.microsoft.com/office/drawing/2014/main" id="{E2994BA1-E63C-41C2-5603-A51DC42CBE50}"/>
-              </a:ext>
-            </a:extLst>
-          </p:cNvPr>
-          <p:cNvCxnSpPr>
-            <a:cxnSpLocks/>
-            <a:stCxn id="3" idx="2"/>
-            <a:endCxn id="8" idx="0"/>
-          </p:cNvCxnSpPr>
-          <p:nvPr/>
-        </p:nvCxnSpPr>
-        <p:spPr>
-          <a:xfrm rot="5400000">
-            <a:off x="2640654" y="1093097"/>
-            <a:ext cx="489923" cy="1066040"/>
-          </a:xfrm>
-          <a:prstGeom prst="bentConnector3">
-            <a:avLst>
-              <a:gd name="adj1" fmla="val 50000"/>
-            </a:avLst>
-          </a:prstGeom>
-          <a:ln>
-            <a:tailEnd type="triangle"/>
-          </a:ln>
-        </p:spPr>
-        <p:style>
-          <a:lnRef idx="1">
-            <a:schemeClr val="accent1"/>
-          </a:lnRef>
-          <a:fillRef idx="0">
-            <a:schemeClr val="accent1"/>
-          </a:fillRef>
-          <a:effectRef idx="0">
-            <a:schemeClr val="accent1"/>
-          </a:effectRef>
-          <a:fontRef idx="minor">
-            <a:schemeClr val="tx1"/>
-          </a:fontRef>
-        </p:style>
-      </p:cxnSp>
-      <p:cxnSp>
-        <p:nvCxnSpPr>
-          <p:cNvPr id="30" name="连接符: 肘形 29">
-            <a:extLst>
-              <a:ext uri="{FF2B5EF4-FFF2-40B4-BE49-F238E27FC236}">
-                <a16:creationId xmlns:a16="http://schemas.microsoft.com/office/drawing/2014/main" id="{B4A26FB3-E28F-F5B8-435D-43D895C59304}"/>
-              </a:ext>
-            </a:extLst>
-          </p:cNvPr>
-          <p:cNvCxnSpPr>
-            <a:cxnSpLocks/>
-            <a:stCxn id="3" idx="2"/>
-            <a:endCxn id="10" idx="0"/>
-          </p:cNvCxnSpPr>
-          <p:nvPr/>
-        </p:nvCxnSpPr>
-        <p:spPr>
-          <a:xfrm rot="16200000" flipH="1">
-            <a:off x="3706693" y="1093097"/>
-            <a:ext cx="489923" cy="1066039"/>
-          </a:xfrm>
-          <a:prstGeom prst="bentConnector3">
-            <a:avLst>
-              <a:gd name="adj1" fmla="val 50000"/>
-            </a:avLst>
-          </a:prstGeom>
-          <a:ln>
-            <a:tailEnd type="triangle"/>
-          </a:ln>
-        </p:spPr>
-        <p:style>
-          <a:lnRef idx="1">
-            <a:schemeClr val="accent1"/>
-          </a:lnRef>
-          <a:fillRef idx="0">
-            <a:schemeClr val="accent1"/>
-          </a:fillRef>
-          <a:effectRef idx="0">
-            <a:schemeClr val="accent1"/>
-          </a:effectRef>
-          <a:fontRef idx="minor">
-            <a:schemeClr val="tx1"/>
-          </a:fontRef>
-        </p:style>
-      </p:cxnSp>
-      <p:cxnSp>
-        <p:nvCxnSpPr>
-          <p:cNvPr id="43" name="直接箭头连接符 42">
-            <a:extLst>
-              <a:ext uri="{FF2B5EF4-FFF2-40B4-BE49-F238E27FC236}">
-                <a16:creationId xmlns:a16="http://schemas.microsoft.com/office/drawing/2014/main" id="{0A70F13B-1FB0-1FF0-DC83-313A468A4894}"/>
-              </a:ext>
-            </a:extLst>
-          </p:cNvPr>
-          <p:cNvCxnSpPr>
-            <a:cxnSpLocks/>
-            <a:stCxn id="8" idx="2"/>
-            <a:endCxn id="12" idx="0"/>
+            <a:stCxn id="2" idx="1"/>
+            <a:endCxn id="78" idx="3"/>
           </p:cNvCxnSpPr>
           <p:nvPr/>
         </p:nvCxnSpPr>
         <p:spPr>
           <a:xfrm flipH="1">
-            <a:off x="2231291" y="2478241"/>
-            <a:ext cx="121304" cy="355136"/>
-          </a:xfrm>
-          <a:prstGeom prst="straightConnector1">
-            <a:avLst/>
-          </a:prstGeom>
-          <a:ln>
-            <a:prstDash val="dash"/>
-            <a:tailEnd type="triangle"/>
-          </a:ln>
-        </p:spPr>
-        <p:style>
-          <a:lnRef idx="1">
-            <a:schemeClr val="accent1"/>
-          </a:lnRef>
-          <a:fillRef idx="0">
-            <a:schemeClr val="accent1"/>
-          </a:fillRef>
-          <a:effectRef idx="0">
-            <a:schemeClr val="accent1"/>
-          </a:effectRef>
-          <a:fontRef idx="minor">
-            <a:schemeClr val="tx1"/>
-          </a:fontRef>
-        </p:style>
-      </p:cxnSp>
-      <p:sp>
-        <p:nvSpPr>
-          <p:cNvPr id="51" name="矩形: 圆角 50">
-            <a:extLst>
-              <a:ext uri="{FF2B5EF4-FFF2-40B4-BE49-F238E27FC236}">
-                <a16:creationId xmlns:a16="http://schemas.microsoft.com/office/drawing/2014/main" id="{04A687B7-DEFF-403D-481F-0EDA8B544F86}"/>
-              </a:ext>
-            </a:extLst>
-          </p:cNvPr>
-          <p:cNvSpPr/>
-          <p:nvPr/>
-        </p:nvSpPr>
-        <p:spPr>
-          <a:xfrm>
-            <a:off x="3611962" y="4375905"/>
-            <a:ext cx="1913685" cy="607162"/>
-          </a:xfrm>
-          <a:prstGeom prst="roundRect">
-            <a:avLst/>
-          </a:prstGeom>
-          <a:solidFill>
-            <a:schemeClr val="accent1">
-              <a:lumMod val="20000"/>
-              <a:lumOff val="80000"/>
-            </a:schemeClr>
-          </a:solidFill>
-          <a:ln>
-            <a:prstDash val="solid"/>
-          </a:ln>
-        </p:spPr>
-        <p:style>
-          <a:lnRef idx="2">
-            <a:schemeClr val="accent1">
-              <a:shade val="15000"/>
-            </a:schemeClr>
-          </a:lnRef>
-          <a:fillRef idx="1">
-            <a:schemeClr val="accent1"/>
-          </a:fillRef>
-          <a:effectRef idx="0">
-            <a:schemeClr val="accent1"/>
-          </a:effectRef>
-          <a:fontRef idx="minor">
-            <a:schemeClr val="lt1"/>
-          </a:fontRef>
-        </p:style>
-        <p:txBody>
-          <a:bodyPr rtlCol="0" anchor="ctr"/>
-          <a:lstStyle/>
-          <a:p>
-            <a:pPr algn="ctr"/>
-            <a:r>
-              <a:rPr lang="zh-CN" altLang="en-US" dirty="0">
-                <a:solidFill>
-                  <a:schemeClr val="tx1"/>
-                </a:solidFill>
-              </a:rPr>
-              <a:t>无额外共享候选</a:t>
-            </a:r>
-            <a:endParaRPr lang="en-US" altLang="zh-CN" dirty="0">
-              <a:solidFill>
-                <a:schemeClr val="tx1"/>
-              </a:solidFill>
-            </a:endParaRPr>
-          </a:p>
-          <a:p>
-            <a:pPr algn="ctr"/>
-            <a:r>
-              <a:rPr lang="zh-CN" altLang="en-US" dirty="0">
-                <a:solidFill>
-                  <a:schemeClr val="tx1"/>
-                </a:solidFill>
-              </a:rPr>
-              <a:t>补全计算路径</a:t>
-            </a:r>
-          </a:p>
-        </p:txBody>
-      </p:sp>
-      <p:cxnSp>
-        <p:nvCxnSpPr>
-          <p:cNvPr id="54" name="直接箭头连接符 53">
-            <a:extLst>
-              <a:ext uri="{FF2B5EF4-FFF2-40B4-BE49-F238E27FC236}">
-                <a16:creationId xmlns:a16="http://schemas.microsoft.com/office/drawing/2014/main" id="{4301AD32-7BC1-C665-C394-6662BF027351}"/>
-              </a:ext>
-            </a:extLst>
-          </p:cNvPr>
-          <p:cNvCxnSpPr>
-            <a:cxnSpLocks/>
-            <a:stCxn id="13" idx="2"/>
-            <a:endCxn id="16" idx="0"/>
-          </p:cNvCxnSpPr>
-          <p:nvPr/>
-        </p:nvCxnSpPr>
-        <p:spPr>
-          <a:xfrm>
-            <a:off x="4568805" y="3188512"/>
-            <a:ext cx="0" cy="265782"/>
+            <a:off x="5868009" y="5205790"/>
+            <a:ext cx="926595" cy="0"/>
           </a:xfrm>
           <a:prstGeom prst="straightConnector1">
             <a:avLst/>
@@ -36304,347 +36915,10 @@
           </a:fontRef>
         </p:style>
       </p:cxnSp>
-      <p:cxnSp>
-        <p:nvCxnSpPr>
-          <p:cNvPr id="59" name="直接箭头连接符 58">
-            <a:extLst>
-              <a:ext uri="{FF2B5EF4-FFF2-40B4-BE49-F238E27FC236}">
-                <a16:creationId xmlns:a16="http://schemas.microsoft.com/office/drawing/2014/main" id="{1FE91423-78A2-EE93-A6E7-F25D04CED864}"/>
-              </a:ext>
-            </a:extLst>
-          </p:cNvPr>
-          <p:cNvCxnSpPr>
-            <a:cxnSpLocks/>
-            <a:stCxn id="16" idx="2"/>
-            <a:endCxn id="51" idx="0"/>
-          </p:cNvCxnSpPr>
-          <p:nvPr/>
-        </p:nvCxnSpPr>
-        <p:spPr>
-          <a:xfrm>
-            <a:off x="4568805" y="4061456"/>
-            <a:ext cx="0" cy="314449"/>
-          </a:xfrm>
-          <a:prstGeom prst="straightConnector1">
-            <a:avLst/>
-          </a:prstGeom>
-          <a:ln>
-            <a:tailEnd type="triangle"/>
-          </a:ln>
-        </p:spPr>
-        <p:style>
-          <a:lnRef idx="1">
-            <a:schemeClr val="accent1"/>
-          </a:lnRef>
-          <a:fillRef idx="0">
-            <a:schemeClr val="accent1"/>
-          </a:fillRef>
-          <a:effectRef idx="0">
-            <a:schemeClr val="accent1"/>
-          </a:effectRef>
-          <a:fontRef idx="minor">
-            <a:schemeClr val="tx1"/>
-          </a:fontRef>
-        </p:style>
-      </p:cxnSp>
-      <p:cxnSp>
-        <p:nvCxnSpPr>
-          <p:cNvPr id="64" name="直接箭头连接符 63">
-            <a:extLst>
-              <a:ext uri="{FF2B5EF4-FFF2-40B4-BE49-F238E27FC236}">
-                <a16:creationId xmlns:a16="http://schemas.microsoft.com/office/drawing/2014/main" id="{C0772217-F7EF-429D-EF5C-EC072E475B0E}"/>
-              </a:ext>
-            </a:extLst>
-          </p:cNvPr>
-          <p:cNvCxnSpPr>
-            <a:cxnSpLocks/>
-            <a:stCxn id="12" idx="2"/>
-            <a:endCxn id="15" idx="0"/>
-          </p:cNvCxnSpPr>
-          <p:nvPr/>
-        </p:nvCxnSpPr>
-        <p:spPr>
-          <a:xfrm>
-            <a:off x="2231291" y="3440539"/>
-            <a:ext cx="0" cy="935366"/>
-          </a:xfrm>
-          <a:prstGeom prst="straightConnector1">
-            <a:avLst/>
-          </a:prstGeom>
-          <a:ln>
-            <a:tailEnd type="triangle"/>
-          </a:ln>
-        </p:spPr>
-        <p:style>
-          <a:lnRef idx="1">
-            <a:schemeClr val="accent1"/>
-          </a:lnRef>
-          <a:fillRef idx="0">
-            <a:schemeClr val="accent1"/>
-          </a:fillRef>
-          <a:effectRef idx="0">
-            <a:schemeClr val="accent1"/>
-          </a:effectRef>
-          <a:fontRef idx="minor">
-            <a:schemeClr val="tx1"/>
-          </a:fontRef>
-        </p:style>
-      </p:cxnSp>
-      <p:cxnSp>
-        <p:nvCxnSpPr>
-          <p:cNvPr id="69" name="直接箭头连接符 68">
-            <a:extLst>
-              <a:ext uri="{FF2B5EF4-FFF2-40B4-BE49-F238E27FC236}">
-                <a16:creationId xmlns:a16="http://schemas.microsoft.com/office/drawing/2014/main" id="{5509C37D-71B7-F6F9-7587-29B9BC4E977F}"/>
-              </a:ext>
-            </a:extLst>
-          </p:cNvPr>
-          <p:cNvCxnSpPr>
-            <a:cxnSpLocks/>
-            <a:stCxn id="15" idx="2"/>
-            <a:endCxn id="17" idx="0"/>
-          </p:cNvCxnSpPr>
-          <p:nvPr/>
-        </p:nvCxnSpPr>
-        <p:spPr>
-          <a:xfrm flipH="1">
-            <a:off x="2231290" y="4983067"/>
-            <a:ext cx="1" cy="296310"/>
-          </a:xfrm>
-          <a:prstGeom prst="straightConnector1">
-            <a:avLst/>
-          </a:prstGeom>
-          <a:ln>
-            <a:tailEnd type="triangle"/>
-          </a:ln>
-        </p:spPr>
-        <p:style>
-          <a:lnRef idx="1">
-            <a:schemeClr val="accent1"/>
-          </a:lnRef>
-          <a:fillRef idx="0">
-            <a:schemeClr val="accent1"/>
-          </a:fillRef>
-          <a:effectRef idx="0">
-            <a:schemeClr val="accent1"/>
-          </a:effectRef>
-          <a:fontRef idx="minor">
-            <a:schemeClr val="tx1"/>
-          </a:fontRef>
-        </p:style>
-      </p:cxnSp>
-      <p:cxnSp>
-        <p:nvCxnSpPr>
-          <p:cNvPr id="77" name="直接箭头连接符 76">
-            <a:extLst>
-              <a:ext uri="{FF2B5EF4-FFF2-40B4-BE49-F238E27FC236}">
-                <a16:creationId xmlns:a16="http://schemas.microsoft.com/office/drawing/2014/main" id="{C905AF2A-168E-8D9E-4969-98442B578F06}"/>
-              </a:ext>
-            </a:extLst>
-          </p:cNvPr>
-          <p:cNvCxnSpPr>
-            <a:cxnSpLocks/>
-            <a:stCxn id="51" idx="2"/>
-            <a:endCxn id="18" idx="0"/>
-          </p:cNvCxnSpPr>
-          <p:nvPr/>
-        </p:nvCxnSpPr>
-        <p:spPr>
-          <a:xfrm flipH="1">
-            <a:off x="4568804" y="4983067"/>
-            <a:ext cx="1" cy="293778"/>
-          </a:xfrm>
-          <a:prstGeom prst="straightConnector1">
-            <a:avLst/>
-          </a:prstGeom>
-          <a:ln>
-            <a:tailEnd type="triangle"/>
-          </a:ln>
-        </p:spPr>
-        <p:style>
-          <a:lnRef idx="1">
-            <a:schemeClr val="accent1"/>
-          </a:lnRef>
-          <a:fillRef idx="0">
-            <a:schemeClr val="accent1"/>
-          </a:fillRef>
-          <a:effectRef idx="0">
-            <a:schemeClr val="accent1"/>
-          </a:effectRef>
-          <a:fontRef idx="minor">
-            <a:schemeClr val="tx1"/>
-          </a:fontRef>
-        </p:style>
-      </p:cxnSp>
-      <p:sp>
-        <p:nvSpPr>
-          <p:cNvPr id="86" name="矩形: 圆角 85">
-            <a:extLst>
-              <a:ext uri="{FF2B5EF4-FFF2-40B4-BE49-F238E27FC236}">
-                <a16:creationId xmlns:a16="http://schemas.microsoft.com/office/drawing/2014/main" id="{3E75D49A-89C3-6C10-AF47-771304924F6E}"/>
-              </a:ext>
-            </a:extLst>
-          </p:cNvPr>
-          <p:cNvSpPr/>
-          <p:nvPr/>
-        </p:nvSpPr>
-        <p:spPr>
-          <a:xfrm>
-            <a:off x="2502101" y="6263089"/>
-            <a:ext cx="1632814" cy="405170"/>
-          </a:xfrm>
-          <a:prstGeom prst="roundRect">
-            <a:avLst/>
-          </a:prstGeom>
-          <a:solidFill>
-            <a:schemeClr val="accent1">
-              <a:lumMod val="20000"/>
-              <a:lumOff val="80000"/>
-            </a:schemeClr>
-          </a:solidFill>
-          <a:ln>
-            <a:prstDash val="solid"/>
-          </a:ln>
-        </p:spPr>
-        <p:style>
-          <a:lnRef idx="2">
-            <a:schemeClr val="accent1">
-              <a:shade val="15000"/>
-            </a:schemeClr>
-          </a:lnRef>
-          <a:fillRef idx="1">
-            <a:schemeClr val="accent1"/>
-          </a:fillRef>
-          <a:effectRef idx="0">
-            <a:schemeClr val="accent1"/>
-          </a:effectRef>
-          <a:fontRef idx="minor">
-            <a:schemeClr val="lt1"/>
-          </a:fontRef>
-        </p:style>
-        <p:txBody>
-          <a:bodyPr rtlCol="0" anchor="ctr"/>
-          <a:lstStyle/>
-          <a:p>
-            <a:pPr algn="ctr"/>
-            <a:r>
-              <a:rPr lang="zh-CN" altLang="en-US" dirty="0">
-                <a:solidFill>
-                  <a:schemeClr val="tx1"/>
-                </a:solidFill>
-              </a:rPr>
-              <a:t>选择</a:t>
-            </a:r>
-            <a:r>
-              <a:rPr lang="en-US" altLang="zh-CN" dirty="0">
-                <a:solidFill>
-                  <a:schemeClr val="tx1"/>
-                </a:solidFill>
-              </a:rPr>
-              <a:t>Sf,mv3</a:t>
-            </a:r>
-            <a:endParaRPr lang="zh-CN" altLang="en-US" dirty="0">
-              <a:solidFill>
-                <a:schemeClr val="tx1"/>
-              </a:solidFill>
-            </a:endParaRPr>
-          </a:p>
-        </p:txBody>
-      </p:sp>
-      <p:cxnSp>
-        <p:nvCxnSpPr>
-          <p:cNvPr id="90" name="连接符: 肘形 89">
-            <a:extLst>
-              <a:ext uri="{FF2B5EF4-FFF2-40B4-BE49-F238E27FC236}">
-                <a16:creationId xmlns:a16="http://schemas.microsoft.com/office/drawing/2014/main" id="{59CD1A2F-63A1-AAA9-9BD5-2634B96FCCDC}"/>
-              </a:ext>
-            </a:extLst>
-          </p:cNvPr>
-          <p:cNvCxnSpPr>
-            <a:cxnSpLocks/>
-            <a:stCxn id="17" idx="2"/>
-            <a:endCxn id="86" idx="0"/>
-          </p:cNvCxnSpPr>
-          <p:nvPr/>
-        </p:nvCxnSpPr>
-        <p:spPr>
-          <a:xfrm rot="16200000" flipH="1">
-            <a:off x="2485628" y="5430209"/>
-            <a:ext cx="578542" cy="1087218"/>
-          </a:xfrm>
-          <a:prstGeom prst="bentConnector3">
-            <a:avLst>
-              <a:gd name="adj1" fmla="val 50000"/>
-            </a:avLst>
-          </a:prstGeom>
-          <a:ln>
-            <a:tailEnd type="triangle"/>
-          </a:ln>
-        </p:spPr>
-        <p:style>
-          <a:lnRef idx="1">
-            <a:schemeClr val="accent1"/>
-          </a:lnRef>
-          <a:fillRef idx="0">
-            <a:schemeClr val="accent1"/>
-          </a:fillRef>
-          <a:effectRef idx="0">
-            <a:schemeClr val="accent1"/>
-          </a:effectRef>
-          <a:fontRef idx="minor">
-            <a:schemeClr val="tx1"/>
-          </a:fontRef>
-        </p:style>
-      </p:cxnSp>
-      <p:cxnSp>
-        <p:nvCxnSpPr>
-          <p:cNvPr id="94" name="连接符: 肘形 93">
-            <a:extLst>
-              <a:ext uri="{FF2B5EF4-FFF2-40B4-BE49-F238E27FC236}">
-                <a16:creationId xmlns:a16="http://schemas.microsoft.com/office/drawing/2014/main" id="{54A2EF3D-85AF-7701-4119-DEE5050E35B7}"/>
-              </a:ext>
-            </a:extLst>
-          </p:cNvPr>
-          <p:cNvCxnSpPr>
-            <a:cxnSpLocks/>
-            <a:stCxn id="18" idx="2"/>
-            <a:endCxn id="86" idx="0"/>
-          </p:cNvCxnSpPr>
-          <p:nvPr/>
-        </p:nvCxnSpPr>
-        <p:spPr>
-          <a:xfrm rot="5400000">
-            <a:off x="3653119" y="5347404"/>
-            <a:ext cx="581074" cy="1250296"/>
-          </a:xfrm>
-          <a:prstGeom prst="bentConnector3">
-            <a:avLst>
-              <a:gd name="adj1" fmla="val 50000"/>
-            </a:avLst>
-          </a:prstGeom>
-          <a:ln>
-            <a:tailEnd type="triangle"/>
-          </a:ln>
-        </p:spPr>
-        <p:style>
-          <a:lnRef idx="1">
-            <a:schemeClr val="accent1"/>
-          </a:lnRef>
-          <a:fillRef idx="0">
-            <a:schemeClr val="accent1"/>
-          </a:fillRef>
-          <a:effectRef idx="0">
-            <a:schemeClr val="accent1"/>
-          </a:effectRef>
-          <a:fontRef idx="minor">
-            <a:schemeClr val="tx1"/>
-          </a:fontRef>
-        </p:style>
-      </p:cxnSp>
     </p:spTree>
     <p:extLst>
       <p:ext uri="{BB962C8B-B14F-4D97-AF65-F5344CB8AC3E}">
-        <p14:creationId xmlns:p14="http://schemas.microsoft.com/office/powerpoint/2010/main" val="1758261970"/>
+        <p14:creationId xmlns:p14="http://schemas.microsoft.com/office/powerpoint/2010/main" val="3681331919"/>
       </p:ext>
     </p:extLst>
   </p:cSld>
